--- a/agentic_ai_expanded.pptx
+++ b/agentic_ai_expanded.pptx
@@ -5,24 +5,24 @@
     <p:sldMasterId id="2147483648" r:id="rId1"/>
   </p:sldMasterIdLst>
   <p:sldIdLst>
-    <p:sldId id="256" r:id="rId2"/>
-    <p:sldId id="257" r:id="rId3"/>
-    <p:sldId id="258" r:id="rId4"/>
-    <p:sldId id="259" r:id="rId5"/>
-    <p:sldId id="260" r:id="rId6"/>
-    <p:sldId id="261" r:id="rId7"/>
-    <p:sldId id="262" r:id="rId8"/>
-    <p:sldId id="263" r:id="rId9"/>
-    <p:sldId id="264" r:id="rId10"/>
-    <p:sldId id="265" r:id="rId11"/>
-    <p:sldId id="266" r:id="rId12"/>
-    <p:sldId id="267" r:id="rId13"/>
-    <p:sldId id="268" r:id="rId14"/>
-    <p:sldId id="269" r:id="rId15"/>
-    <p:sldId id="270" r:id="rId16"/>
-    <p:sldId id="271" r:id="rId17"/>
-    <p:sldId id="272" r:id="rId18"/>
-    <p:sldId id="273" r:id="rId19"/>
+    <p:sldId id="256" r:id="rId7"/>
+    <p:sldId id="257" r:id="rId8"/>
+    <p:sldId id="258" r:id="rId9"/>
+    <p:sldId id="259" r:id="rId10"/>
+    <p:sldId id="260" r:id="rId11"/>
+    <p:sldId id="261" r:id="rId12"/>
+    <p:sldId id="262" r:id="rId13"/>
+    <p:sldId id="263" r:id="rId14"/>
+    <p:sldId id="264" r:id="rId15"/>
+    <p:sldId id="265" r:id="rId16"/>
+    <p:sldId id="266" r:id="rId17"/>
+    <p:sldId id="267" r:id="rId18"/>
+    <p:sldId id="268" r:id="rId19"/>
+    <p:sldId id="269" r:id="rId20"/>
+    <p:sldId id="270" r:id="rId21"/>
+    <p:sldId id="271" r:id="rId22"/>
+    <p:sldId id="272" r:id="rId23"/>
+    <p:sldId id="273" r:id="rId24"/>
   </p:sldIdLst>
   <p:sldSz cx="9144000" cy="6858000" type="screen4x3"/>
   <p:notesSz cx="6858000" cy="9144000"/>
@@ -121,22 +121,6 @@
       </a:defRPr>
     </a:lvl9pPr>
   </p:defaultTextStyle>
-  <p:extLst>
-    <p:ext uri="{EFAFB233-063F-42B5-8137-9DF3F51BA10A}">
-      <p15:sldGuideLst xmlns:p15="http://schemas.microsoft.com/office/powerpoint/2012/main">
-        <p15:guide id="1" orient="horz" pos="2160">
-          <p15:clr>
-            <a:srgbClr val="A4A3A4"/>
-          </p15:clr>
-        </p15:guide>
-        <p15:guide id="2" pos="2880">
-          <p15:clr>
-            <a:srgbClr val="A4A3A4"/>
-          </p15:clr>
-        </p15:guide>
-      </p15:sldGuideLst>
-    </p:ext>
-  </p:extLst>
 </p:presentation>
 </file>
 
@@ -178,9 +162,10 @@
           <a:lstStyle/>
           <a:p>
             <a:r>
-              <a:rPr lang="en-US"/>
+              <a:rPr lang="en-US" smtClean="0"/>
               <a:t>Click to edit Master title style</a:t>
             </a:r>
+            <a:endParaRPr lang="en-US"/>
           </a:p>
         </p:txBody>
       </p:sp>
@@ -296,9 +281,10 @@
           </a:lstStyle>
           <a:p>
             <a:r>
-              <a:rPr lang="en-US"/>
+              <a:rPr lang="en-US" smtClean="0"/>
               <a:t>Click to edit Master subtitle style</a:t>
             </a:r>
+            <a:endParaRPr lang="en-US"/>
           </a:p>
         </p:txBody>
       </p:sp>
@@ -319,7 +305,7 @@
           <a:p>
             <a:fld id="{5BCAD085-E8A6-8845-BD4E-CB4CCA059FC4}" type="datetimeFigureOut">
               <a:rPr lang="en-US" smtClean="0"/>
-              <a:t>3/22/2026</a:t>
+              <a:t>1/27/13</a:t>
             </a:fld>
             <a:endParaRPr lang="en-US"/>
           </a:p>
@@ -413,9 +399,10 @@
           <a:lstStyle/>
           <a:p>
             <a:r>
-              <a:rPr lang="en-US"/>
+              <a:rPr lang="en-US" smtClean="0"/>
               <a:t>Click to edit Master title style</a:t>
             </a:r>
+            <a:endParaRPr lang="en-US"/>
           </a:p>
         </p:txBody>
       </p:sp>
@@ -436,37 +423,38 @@
           <a:p>
             <a:pPr lvl="0"/>
             <a:r>
-              <a:rPr lang="en-US"/>
+              <a:rPr lang="en-US" smtClean="0"/>
               <a:t>Click to edit Master text styles</a:t>
             </a:r>
           </a:p>
           <a:p>
             <a:pPr lvl="1"/>
             <a:r>
-              <a:rPr lang="en-US"/>
+              <a:rPr lang="en-US" smtClean="0"/>
               <a:t>Second level</a:t>
             </a:r>
           </a:p>
           <a:p>
             <a:pPr lvl="2"/>
             <a:r>
-              <a:rPr lang="en-US"/>
+              <a:rPr lang="en-US" smtClean="0"/>
               <a:t>Third level</a:t>
             </a:r>
           </a:p>
           <a:p>
             <a:pPr lvl="3"/>
             <a:r>
-              <a:rPr lang="en-US"/>
+              <a:rPr lang="en-US" smtClean="0"/>
               <a:t>Fourth level</a:t>
             </a:r>
           </a:p>
           <a:p>
             <a:pPr lvl="4"/>
             <a:r>
-              <a:rPr lang="en-US"/>
+              <a:rPr lang="en-US" smtClean="0"/>
               <a:t>Fifth level</a:t>
             </a:r>
+            <a:endParaRPr lang="en-US"/>
           </a:p>
         </p:txBody>
       </p:sp>
@@ -487,7 +475,7 @@
           <a:p>
             <a:fld id="{5BCAD085-E8A6-8845-BD4E-CB4CCA059FC4}" type="datetimeFigureOut">
               <a:rPr lang="en-US" smtClean="0"/>
-              <a:t>3/22/2026</a:t>
+              <a:t>1/27/13</a:t>
             </a:fld>
             <a:endParaRPr lang="en-US"/>
           </a:p>
@@ -586,9 +574,10 @@
           <a:lstStyle/>
           <a:p>
             <a:r>
-              <a:rPr lang="en-US"/>
+              <a:rPr lang="en-US" smtClean="0"/>
               <a:t>Click to edit Master title style</a:t>
             </a:r>
+            <a:endParaRPr lang="en-US"/>
           </a:p>
         </p:txBody>
       </p:sp>
@@ -614,37 +603,38 @@
           <a:p>
             <a:pPr lvl="0"/>
             <a:r>
-              <a:rPr lang="en-US"/>
+              <a:rPr lang="en-US" smtClean="0"/>
               <a:t>Click to edit Master text styles</a:t>
             </a:r>
           </a:p>
           <a:p>
             <a:pPr lvl="1"/>
             <a:r>
-              <a:rPr lang="en-US"/>
+              <a:rPr lang="en-US" smtClean="0"/>
               <a:t>Second level</a:t>
             </a:r>
           </a:p>
           <a:p>
             <a:pPr lvl="2"/>
             <a:r>
-              <a:rPr lang="en-US"/>
+              <a:rPr lang="en-US" smtClean="0"/>
               <a:t>Third level</a:t>
             </a:r>
           </a:p>
           <a:p>
             <a:pPr lvl="3"/>
             <a:r>
-              <a:rPr lang="en-US"/>
+              <a:rPr lang="en-US" smtClean="0"/>
               <a:t>Fourth level</a:t>
             </a:r>
           </a:p>
           <a:p>
             <a:pPr lvl="4"/>
             <a:r>
-              <a:rPr lang="en-US"/>
+              <a:rPr lang="en-US" smtClean="0"/>
               <a:t>Fifth level</a:t>
             </a:r>
+            <a:endParaRPr lang="en-US"/>
           </a:p>
         </p:txBody>
       </p:sp>
@@ -665,7 +655,7 @@
           <a:p>
             <a:fld id="{5BCAD085-E8A6-8845-BD4E-CB4CCA059FC4}" type="datetimeFigureOut">
               <a:rPr lang="en-US" smtClean="0"/>
-              <a:t>3/22/2026</a:t>
+              <a:t>1/27/13</a:t>
             </a:fld>
             <a:endParaRPr lang="en-US"/>
           </a:p>
@@ -759,9 +749,10 @@
           <a:lstStyle/>
           <a:p>
             <a:r>
-              <a:rPr lang="en-US"/>
+              <a:rPr lang="en-US" smtClean="0"/>
               <a:t>Click to edit Master title style</a:t>
             </a:r>
+            <a:endParaRPr lang="en-US"/>
           </a:p>
         </p:txBody>
       </p:sp>
@@ -782,37 +773,38 @@
           <a:p>
             <a:pPr lvl="0"/>
             <a:r>
-              <a:rPr lang="en-US"/>
+              <a:rPr lang="en-US" smtClean="0"/>
               <a:t>Click to edit Master text styles</a:t>
             </a:r>
           </a:p>
           <a:p>
             <a:pPr lvl="1"/>
             <a:r>
-              <a:rPr lang="en-US"/>
+              <a:rPr lang="en-US" smtClean="0"/>
               <a:t>Second level</a:t>
             </a:r>
           </a:p>
           <a:p>
             <a:pPr lvl="2"/>
             <a:r>
-              <a:rPr lang="en-US"/>
+              <a:rPr lang="en-US" smtClean="0"/>
               <a:t>Third level</a:t>
             </a:r>
           </a:p>
           <a:p>
             <a:pPr lvl="3"/>
             <a:r>
-              <a:rPr lang="en-US"/>
+              <a:rPr lang="en-US" smtClean="0"/>
               <a:t>Fourth level</a:t>
             </a:r>
           </a:p>
           <a:p>
             <a:pPr lvl="4"/>
             <a:r>
-              <a:rPr lang="en-US"/>
+              <a:rPr lang="en-US" smtClean="0"/>
               <a:t>Fifth level</a:t>
             </a:r>
+            <a:endParaRPr lang="en-US"/>
           </a:p>
         </p:txBody>
       </p:sp>
@@ -833,7 +825,7 @@
           <a:p>
             <a:fld id="{5BCAD085-E8A6-8845-BD4E-CB4CCA059FC4}" type="datetimeFigureOut">
               <a:rPr lang="en-US" smtClean="0"/>
-              <a:t>3/22/2026</a:t>
+              <a:t>1/27/13</a:t>
             </a:fld>
             <a:endParaRPr lang="en-US"/>
           </a:p>
@@ -936,9 +928,10 @@
           </a:lstStyle>
           <a:p>
             <a:r>
-              <a:rPr lang="en-US"/>
+              <a:rPr lang="en-US" smtClean="0"/>
               <a:t>Click to edit Master title style</a:t>
             </a:r>
+            <a:endParaRPr lang="en-US"/>
           </a:p>
         </p:txBody>
       </p:sp>
@@ -1055,7 +1048,7 @@
           <a:p>
             <a:pPr lvl="0"/>
             <a:r>
-              <a:rPr lang="en-US"/>
+              <a:rPr lang="en-US" smtClean="0"/>
               <a:t>Click to edit Master text styles</a:t>
             </a:r>
           </a:p>
@@ -1078,7 +1071,7 @@
           <a:p>
             <a:fld id="{5BCAD085-E8A6-8845-BD4E-CB4CCA059FC4}" type="datetimeFigureOut">
               <a:rPr lang="en-US" smtClean="0"/>
-              <a:t>3/22/2026</a:t>
+              <a:t>1/27/13</a:t>
             </a:fld>
             <a:endParaRPr lang="en-US"/>
           </a:p>
@@ -1172,9 +1165,10 @@
           <a:lstStyle/>
           <a:p>
             <a:r>
-              <a:rPr lang="en-US"/>
+              <a:rPr lang="en-US" smtClean="0"/>
               <a:t>Click to edit Master title style</a:t>
             </a:r>
+            <a:endParaRPr lang="en-US"/>
           </a:p>
         </p:txBody>
       </p:sp>
@@ -1228,37 +1222,38 @@
           <a:p>
             <a:pPr lvl="0"/>
             <a:r>
-              <a:rPr lang="en-US"/>
+              <a:rPr lang="en-US" smtClean="0"/>
               <a:t>Click to edit Master text styles</a:t>
             </a:r>
           </a:p>
           <a:p>
             <a:pPr lvl="1"/>
             <a:r>
-              <a:rPr lang="en-US"/>
+              <a:rPr lang="en-US" smtClean="0"/>
               <a:t>Second level</a:t>
             </a:r>
           </a:p>
           <a:p>
             <a:pPr lvl="2"/>
             <a:r>
-              <a:rPr lang="en-US"/>
+              <a:rPr lang="en-US" smtClean="0"/>
               <a:t>Third level</a:t>
             </a:r>
           </a:p>
           <a:p>
             <a:pPr lvl="3"/>
             <a:r>
-              <a:rPr lang="en-US"/>
+              <a:rPr lang="en-US" smtClean="0"/>
               <a:t>Fourth level</a:t>
             </a:r>
           </a:p>
           <a:p>
             <a:pPr lvl="4"/>
             <a:r>
-              <a:rPr lang="en-US"/>
+              <a:rPr lang="en-US" smtClean="0"/>
               <a:t>Fifth level</a:t>
             </a:r>
+            <a:endParaRPr lang="en-US"/>
           </a:p>
         </p:txBody>
       </p:sp>
@@ -1312,37 +1307,38 @@
           <a:p>
             <a:pPr lvl="0"/>
             <a:r>
-              <a:rPr lang="en-US"/>
+              <a:rPr lang="en-US" smtClean="0"/>
               <a:t>Click to edit Master text styles</a:t>
             </a:r>
           </a:p>
           <a:p>
             <a:pPr lvl="1"/>
             <a:r>
-              <a:rPr lang="en-US"/>
+              <a:rPr lang="en-US" smtClean="0"/>
               <a:t>Second level</a:t>
             </a:r>
           </a:p>
           <a:p>
             <a:pPr lvl="2"/>
             <a:r>
-              <a:rPr lang="en-US"/>
+              <a:rPr lang="en-US" smtClean="0"/>
               <a:t>Third level</a:t>
             </a:r>
           </a:p>
           <a:p>
             <a:pPr lvl="3"/>
             <a:r>
-              <a:rPr lang="en-US"/>
+              <a:rPr lang="en-US" smtClean="0"/>
               <a:t>Fourth level</a:t>
             </a:r>
           </a:p>
           <a:p>
             <a:pPr lvl="4"/>
             <a:r>
-              <a:rPr lang="en-US"/>
+              <a:rPr lang="en-US" smtClean="0"/>
               <a:t>Fifth level</a:t>
             </a:r>
+            <a:endParaRPr lang="en-US"/>
           </a:p>
         </p:txBody>
       </p:sp>
@@ -1363,7 +1359,7 @@
           <a:p>
             <a:fld id="{5BCAD085-E8A6-8845-BD4E-CB4CCA059FC4}" type="datetimeFigureOut">
               <a:rPr lang="en-US" smtClean="0"/>
-              <a:t>3/22/2026</a:t>
+              <a:t>1/27/13</a:t>
             </a:fld>
             <a:endParaRPr lang="en-US"/>
           </a:p>
@@ -1461,9 +1457,10 @@
           </a:lstStyle>
           <a:p>
             <a:r>
-              <a:rPr lang="en-US"/>
+              <a:rPr lang="en-US" smtClean="0"/>
               <a:t>Click to edit Master title style</a:t>
             </a:r>
+            <a:endParaRPr lang="en-US"/>
           </a:p>
         </p:txBody>
       </p:sp>
@@ -1526,7 +1523,7 @@
           <a:p>
             <a:pPr lvl="0"/>
             <a:r>
-              <a:rPr lang="en-US"/>
+              <a:rPr lang="en-US" smtClean="0"/>
               <a:t>Click to edit Master text styles</a:t>
             </a:r>
           </a:p>
@@ -1582,37 +1579,38 @@
           <a:p>
             <a:pPr lvl="0"/>
             <a:r>
-              <a:rPr lang="en-US"/>
+              <a:rPr lang="en-US" smtClean="0"/>
               <a:t>Click to edit Master text styles</a:t>
             </a:r>
           </a:p>
           <a:p>
             <a:pPr lvl="1"/>
             <a:r>
-              <a:rPr lang="en-US"/>
+              <a:rPr lang="en-US" smtClean="0"/>
               <a:t>Second level</a:t>
             </a:r>
           </a:p>
           <a:p>
             <a:pPr lvl="2"/>
             <a:r>
-              <a:rPr lang="en-US"/>
+              <a:rPr lang="en-US" smtClean="0"/>
               <a:t>Third level</a:t>
             </a:r>
           </a:p>
           <a:p>
             <a:pPr lvl="3"/>
             <a:r>
-              <a:rPr lang="en-US"/>
+              <a:rPr lang="en-US" smtClean="0"/>
               <a:t>Fourth level</a:t>
             </a:r>
           </a:p>
           <a:p>
             <a:pPr lvl="4"/>
             <a:r>
-              <a:rPr lang="en-US"/>
+              <a:rPr lang="en-US" smtClean="0"/>
               <a:t>Fifth level</a:t>
             </a:r>
+            <a:endParaRPr lang="en-US"/>
           </a:p>
         </p:txBody>
       </p:sp>
@@ -1675,7 +1673,7 @@
           <a:p>
             <a:pPr lvl="0"/>
             <a:r>
-              <a:rPr lang="en-US"/>
+              <a:rPr lang="en-US" smtClean="0"/>
               <a:t>Click to edit Master text styles</a:t>
             </a:r>
           </a:p>
@@ -1731,37 +1729,38 @@
           <a:p>
             <a:pPr lvl="0"/>
             <a:r>
-              <a:rPr lang="en-US"/>
+              <a:rPr lang="en-US" smtClean="0"/>
               <a:t>Click to edit Master text styles</a:t>
             </a:r>
           </a:p>
           <a:p>
             <a:pPr lvl="1"/>
             <a:r>
-              <a:rPr lang="en-US"/>
+              <a:rPr lang="en-US" smtClean="0"/>
               <a:t>Second level</a:t>
             </a:r>
           </a:p>
           <a:p>
             <a:pPr lvl="2"/>
             <a:r>
-              <a:rPr lang="en-US"/>
+              <a:rPr lang="en-US" smtClean="0"/>
               <a:t>Third level</a:t>
             </a:r>
           </a:p>
           <a:p>
             <a:pPr lvl="3"/>
             <a:r>
-              <a:rPr lang="en-US"/>
+              <a:rPr lang="en-US" smtClean="0"/>
               <a:t>Fourth level</a:t>
             </a:r>
           </a:p>
           <a:p>
             <a:pPr lvl="4"/>
             <a:r>
-              <a:rPr lang="en-US"/>
+              <a:rPr lang="en-US" smtClean="0"/>
               <a:t>Fifth level</a:t>
             </a:r>
+            <a:endParaRPr lang="en-US"/>
           </a:p>
         </p:txBody>
       </p:sp>
@@ -1782,7 +1781,7 @@
           <a:p>
             <a:fld id="{5BCAD085-E8A6-8845-BD4E-CB4CCA059FC4}" type="datetimeFigureOut">
               <a:rPr lang="en-US" smtClean="0"/>
-              <a:t>3/22/2026</a:t>
+              <a:t>1/27/13</a:t>
             </a:fld>
             <a:endParaRPr lang="en-US"/>
           </a:p>
@@ -1876,9 +1875,10 @@
           <a:lstStyle/>
           <a:p>
             <a:r>
-              <a:rPr lang="en-US"/>
+              <a:rPr lang="en-US" smtClean="0"/>
               <a:t>Click to edit Master title style</a:t>
             </a:r>
+            <a:endParaRPr lang="en-US"/>
           </a:p>
         </p:txBody>
       </p:sp>
@@ -1899,7 +1899,7 @@
           <a:p>
             <a:fld id="{5BCAD085-E8A6-8845-BD4E-CB4CCA059FC4}" type="datetimeFigureOut">
               <a:rPr lang="en-US" smtClean="0"/>
-              <a:t>3/22/2026</a:t>
+              <a:t>1/27/13</a:t>
             </a:fld>
             <a:endParaRPr lang="en-US"/>
           </a:p>
@@ -1994,7 +1994,7 @@
           <a:p>
             <a:fld id="{5BCAD085-E8A6-8845-BD4E-CB4CCA059FC4}" type="datetimeFigureOut">
               <a:rPr lang="en-US" smtClean="0"/>
-              <a:t>3/22/2026</a:t>
+              <a:t>1/27/13</a:t>
             </a:fld>
             <a:endParaRPr lang="en-US"/>
           </a:p>
@@ -2097,9 +2097,10 @@
           </a:lstStyle>
           <a:p>
             <a:r>
-              <a:rPr lang="en-US"/>
+              <a:rPr lang="en-US" smtClean="0"/>
               <a:t>Click to edit Master title style</a:t>
             </a:r>
+            <a:endParaRPr lang="en-US"/>
           </a:p>
         </p:txBody>
       </p:sp>
@@ -2153,37 +2154,38 @@
           <a:p>
             <a:pPr lvl="0"/>
             <a:r>
-              <a:rPr lang="en-US"/>
+              <a:rPr lang="en-US" smtClean="0"/>
               <a:t>Click to edit Master text styles</a:t>
             </a:r>
           </a:p>
           <a:p>
             <a:pPr lvl="1"/>
             <a:r>
-              <a:rPr lang="en-US"/>
+              <a:rPr lang="en-US" smtClean="0"/>
               <a:t>Second level</a:t>
             </a:r>
           </a:p>
           <a:p>
             <a:pPr lvl="2"/>
             <a:r>
-              <a:rPr lang="en-US"/>
+              <a:rPr lang="en-US" smtClean="0"/>
               <a:t>Third level</a:t>
             </a:r>
           </a:p>
           <a:p>
             <a:pPr lvl="3"/>
             <a:r>
-              <a:rPr lang="en-US"/>
+              <a:rPr lang="en-US" smtClean="0"/>
               <a:t>Fourth level</a:t>
             </a:r>
           </a:p>
           <a:p>
             <a:pPr lvl="4"/>
             <a:r>
-              <a:rPr lang="en-US"/>
+              <a:rPr lang="en-US" smtClean="0"/>
               <a:t>Fifth level</a:t>
             </a:r>
+            <a:endParaRPr lang="en-US"/>
           </a:p>
         </p:txBody>
       </p:sp>
@@ -2246,7 +2248,7 @@
           <a:p>
             <a:pPr lvl="0"/>
             <a:r>
-              <a:rPr lang="en-US"/>
+              <a:rPr lang="en-US" smtClean="0"/>
               <a:t>Click to edit Master text styles</a:t>
             </a:r>
           </a:p>
@@ -2269,7 +2271,7 @@
           <a:p>
             <a:fld id="{5BCAD085-E8A6-8845-BD4E-CB4CCA059FC4}" type="datetimeFigureOut">
               <a:rPr lang="en-US" smtClean="0"/>
-              <a:t>3/22/2026</a:t>
+              <a:t>1/27/13</a:t>
             </a:fld>
             <a:endParaRPr lang="en-US"/>
           </a:p>
@@ -2372,9 +2374,10 @@
           </a:lstStyle>
           <a:p>
             <a:r>
-              <a:rPr lang="en-US"/>
+              <a:rPr lang="en-US" smtClean="0"/>
               <a:t>Click to edit Master title style</a:t>
             </a:r>
+            <a:endParaRPr lang="en-US"/>
           </a:p>
         </p:txBody>
       </p:sp>
@@ -2498,7 +2501,7 @@
           <a:p>
             <a:pPr lvl="0"/>
             <a:r>
-              <a:rPr lang="en-US"/>
+              <a:rPr lang="en-US" smtClean="0"/>
               <a:t>Click to edit Master text styles</a:t>
             </a:r>
           </a:p>
@@ -2521,7 +2524,7 @@
           <a:p>
             <a:fld id="{5BCAD085-E8A6-8845-BD4E-CB4CCA059FC4}" type="datetimeFigureOut">
               <a:rPr lang="en-US" smtClean="0"/>
-              <a:t>3/22/2026</a:t>
+              <a:t>1/27/13</a:t>
             </a:fld>
             <a:endParaRPr lang="en-US"/>
           </a:p>
@@ -2630,9 +2633,10 @@
           <a:lstStyle/>
           <a:p>
             <a:r>
-              <a:rPr lang="en-US"/>
+              <a:rPr lang="en-US" smtClean="0"/>
               <a:t>Click to edit Master title style</a:t>
             </a:r>
+            <a:endParaRPr lang="en-US"/>
           </a:p>
         </p:txBody>
       </p:sp>
@@ -2663,37 +2667,38 @@
           <a:p>
             <a:pPr lvl="0"/>
             <a:r>
-              <a:rPr lang="en-US"/>
+              <a:rPr lang="en-US" smtClean="0"/>
               <a:t>Click to edit Master text styles</a:t>
             </a:r>
           </a:p>
           <a:p>
             <a:pPr lvl="1"/>
             <a:r>
-              <a:rPr lang="en-US"/>
+              <a:rPr lang="en-US" smtClean="0"/>
               <a:t>Second level</a:t>
             </a:r>
           </a:p>
           <a:p>
             <a:pPr lvl="2"/>
             <a:r>
-              <a:rPr lang="en-US"/>
+              <a:rPr lang="en-US" smtClean="0"/>
               <a:t>Third level</a:t>
             </a:r>
           </a:p>
           <a:p>
             <a:pPr lvl="3"/>
             <a:r>
-              <a:rPr lang="en-US"/>
+              <a:rPr lang="en-US" smtClean="0"/>
               <a:t>Fourth level</a:t>
             </a:r>
           </a:p>
           <a:p>
             <a:pPr lvl="4"/>
             <a:r>
-              <a:rPr lang="en-US"/>
+              <a:rPr lang="en-US" smtClean="0"/>
               <a:t>Fifth level</a:t>
             </a:r>
+            <a:endParaRPr lang="en-US"/>
           </a:p>
         </p:txBody>
       </p:sp>
@@ -2732,7 +2737,7 @@
           <a:p>
             <a:fld id="{5BCAD085-E8A6-8845-BD4E-CB4CCA059FC4}" type="datetimeFigureOut">
               <a:rPr lang="en-US" smtClean="0"/>
-              <a:t>3/22/2026</a:t>
+              <a:t>1/27/13</a:t>
             </a:fld>
             <a:endParaRPr lang="en-US"/>
           </a:p>
@@ -3091,7 +3096,7 @@
 </file>
 
 <file path=ppt/slides/slide1.xml><?xml version="1.0" encoding="utf-8"?>
-<p:sld xmlns:a="http://schemas.openxmlformats.org/drawingml/2006/main" xmlns:r="http://schemas.openxmlformats.org/officeDocument/2006/relationships" xmlns:p="http://schemas.openxmlformats.org/presentationml/2006/main">
+<p:sld xmlns:a="http://schemas.openxmlformats.org/drawingml/2006/main" xmlns:p="http://schemas.openxmlformats.org/presentationml/2006/main" xmlns:r="http://schemas.openxmlformats.org/officeDocument/2006/relationships">
   <p:cSld>
     <p:spTree>
       <p:nvGrpSpPr>
@@ -3099,14 +3104,7 @@
         <p:cNvGrpSpPr/>
         <p:nvPr/>
       </p:nvGrpSpPr>
-      <p:grpSpPr>
-        <a:xfrm>
-          <a:off x="0" y="0"/>
-          <a:ext cx="0" cy="0"/>
-          <a:chOff x="0" y="0"/>
-          <a:chExt cx="0" cy="0"/>
-        </a:xfrm>
-      </p:grpSpPr>
+      <p:grpSpPr/>
       <p:sp>
         <p:nvSpPr>
           <p:cNvPr id="2" name="Title 1"/>
@@ -3138,32 +3136,25 @@
             <p:ph idx="1"/>
           </p:nvPr>
         </p:nvSpPr>
-        <p:spPr>
-          <a:xfrm>
-            <a:off x="339213" y="1166018"/>
-            <a:ext cx="8229600" cy="4525963"/>
-          </a:xfrm>
-        </p:spPr>
-        <p:txBody>
-          <a:bodyPr>
-            <a:normAutofit fontScale="92500" lnSpcReduction="10000"/>
-          </a:bodyPr>
-          <a:lstStyle/>
-          <a:p>
-            <a:r>
-              <a:rPr lang="en-US" b="1" dirty="0"/>
+        <p:spPr/>
+        <p:txBody>
+          <a:bodyPr/>
+          <a:lstStyle/>
+          <a:p>
+            <a:r>
+              <a:rPr lang="en-US" b="1"/>
               <a:t>From Automation to Autonomous Decision-Making</a:t>
             </a:r>
           </a:p>
           <a:p>
             <a:r>
-              <a:rPr lang="en-US" dirty="0"/>
+              <a:rPr lang="en-US"/>
               <a:t>AI agents don’t just respond — they plan, act, and learn. This presentation explores how enterprises are deploying autonomous AI systems to handle complex, multi-step workflows with minimal human intervention.</a:t>
             </a:r>
           </a:p>
           <a:p>
             <a:r>
-              <a:rPr lang="en-US" i="1" dirty="0"/>
+              <a:rPr lang="en-US" i="1"/>
               <a:t>“The question is not whether AI will replace humans, but which humans will use AI to replace others.” — Harvard Business Review, 2024</a:t>
             </a:r>
           </a:p>
@@ -3178,7 +3169,7 @@
 </file>
 
 <file path=ppt/slides/slide10.xml><?xml version="1.0" encoding="utf-8"?>
-<p:sld xmlns:a="http://schemas.openxmlformats.org/drawingml/2006/main" xmlns:r="http://schemas.openxmlformats.org/officeDocument/2006/relationships" xmlns:p="http://schemas.openxmlformats.org/presentationml/2006/main">
+<p:sld xmlns:a="http://schemas.openxmlformats.org/drawingml/2006/main" xmlns:p="http://schemas.openxmlformats.org/presentationml/2006/main" xmlns:r="http://schemas.openxmlformats.org/officeDocument/2006/relationships">
   <p:cSld>
     <p:spTree>
       <p:nvGrpSpPr>
@@ -3186,14 +3177,7 @@
         <p:cNvGrpSpPr/>
         <p:nvPr/>
       </p:nvGrpSpPr>
-      <p:grpSpPr>
-        <a:xfrm>
-          <a:off x="0" y="0"/>
-          <a:ext cx="0" cy="0"/>
-          <a:chOff x="0" y="0"/>
-          <a:chExt cx="0" cy="0"/>
-        </a:xfrm>
-      </p:grpSpPr>
+      <p:grpSpPr/>
       <p:sp>
         <p:nvSpPr>
           <p:cNvPr id="2" name="Title 1"/>
@@ -3225,68 +3209,61 @@
             <p:ph idx="1"/>
           </p:nvPr>
         </p:nvSpPr>
-        <p:spPr>
-          <a:xfrm>
-            <a:off x="457200" y="1275735"/>
-            <a:ext cx="8229600" cy="4525963"/>
-          </a:xfrm>
-        </p:spPr>
-        <p:txBody>
-          <a:bodyPr>
-            <a:normAutofit fontScale="62500" lnSpcReduction="20000"/>
-          </a:bodyPr>
-          <a:lstStyle/>
-          <a:p>
-            <a:r>
-              <a:rPr lang="en-US" b="1" dirty="0"/>
+        <p:spPr/>
+        <p:txBody>
+          <a:bodyPr/>
+          <a:lstStyle/>
+          <a:p>
+            <a:r>
+              <a:rPr lang="en-US" b="1"/>
               <a:t>Scenario: Enterprise Customer Support Agent</a:t>
             </a:r>
           </a:p>
           <a:p>
             <a:r>
-              <a:rPr lang="en-US" dirty="0"/>
+              <a:rPr lang="en-US"/>
               <a:t>A customer emails: “My invoice from last month is wrong. Can you fix it and resend?”</a:t>
             </a:r>
           </a:p>
           <a:p>
             <a:r>
-              <a:rPr lang="en-US" b="1" dirty="0"/>
+              <a:rPr lang="en-US" b="1"/>
               <a:t>Step 1: Understand</a:t>
             </a:r>
           </a:p>
           <a:p>
             <a:r>
-              <a:rPr lang="en-US" dirty="0"/>
+              <a:rPr lang="en-US"/>
               <a:t>Agent parses the email, identifies intent (billing dispute), and extracts customer ID from the email signature.</a:t>
             </a:r>
           </a:p>
           <a:p>
             <a:r>
-              <a:rPr lang="en-US" b="1" dirty="0"/>
+              <a:rPr lang="en-US" b="1"/>
               <a:t>Step 2: Retrieve &amp; Diagnose</a:t>
             </a:r>
           </a:p>
           <a:p>
             <a:r>
-              <a:rPr lang="en-US" dirty="0"/>
+              <a:rPr lang="en-US"/>
               <a:t>Queries CRM for account history, pulls last invoice from the billing system, and compares line items against contract terms to identify the discrepancy.</a:t>
             </a:r>
           </a:p>
           <a:p>
             <a:r>
-              <a:rPr lang="en-US" b="1" dirty="0"/>
+              <a:rPr lang="en-US" b="1"/>
               <a:t>Step 3: Act &amp; Close</a:t>
             </a:r>
           </a:p>
           <a:p>
             <a:r>
-              <a:rPr lang="en-US" dirty="0"/>
+              <a:rPr lang="en-US"/>
               <a:t>Corrects the invoice in the billing system, generates a PDF, emails it to the customer with an explanation, and logs the resolution in CRM — all without human involvement.</a:t>
             </a:r>
           </a:p>
           <a:p>
             <a:r>
-              <a:rPr lang="en-US" i="1" dirty="0"/>
+              <a:rPr lang="en-US" i="1"/>
               <a:t>Result: Resolution time drops from 48 hours to under 3 minutes. CSAT scores improve by 35%.</a:t>
             </a:r>
           </a:p>
@@ -3301,7 +3278,7 @@
 </file>
 
 <file path=ppt/slides/slide11.xml><?xml version="1.0" encoding="utf-8"?>
-<p:sld xmlns:a="http://schemas.openxmlformats.org/drawingml/2006/main" xmlns:r="http://schemas.openxmlformats.org/officeDocument/2006/relationships" xmlns:p="http://schemas.openxmlformats.org/presentationml/2006/main">
+<p:sld xmlns:a="http://schemas.openxmlformats.org/drawingml/2006/main" xmlns:p="http://schemas.openxmlformats.org/presentationml/2006/main" xmlns:r="http://schemas.openxmlformats.org/officeDocument/2006/relationships">
   <p:cSld>
     <p:spTree>
       <p:nvGrpSpPr>
@@ -3309,14 +3286,7 @@
         <p:cNvGrpSpPr/>
         <p:nvPr/>
       </p:nvGrpSpPr>
-      <p:grpSpPr>
-        <a:xfrm>
-          <a:off x="0" y="0"/>
-          <a:ext cx="0" cy="0"/>
-          <a:chOff x="0" y="0"/>
-          <a:chExt cx="0" cy="0"/>
-        </a:xfrm>
-      </p:grpSpPr>
+      <p:grpSpPr/>
       <p:sp>
         <p:nvSpPr>
           <p:cNvPr id="2" name="Title 1"/>
@@ -3348,62 +3318,55 @@
             <p:ph idx="1"/>
           </p:nvPr>
         </p:nvSpPr>
-        <p:spPr>
-          <a:xfrm>
-            <a:off x="388374" y="1039761"/>
-            <a:ext cx="8229600" cy="4525963"/>
-          </a:xfrm>
-        </p:spPr>
-        <p:txBody>
-          <a:bodyPr>
-            <a:normAutofit fontScale="55000" lnSpcReduction="20000"/>
-          </a:bodyPr>
-          <a:lstStyle/>
-          <a:p>
-            <a:r>
-              <a:rPr lang="en-US" b="1" dirty="0"/>
+        <p:spPr/>
+        <p:txBody>
+          <a:bodyPr/>
+          <a:lstStyle/>
+          <a:p>
+            <a:r>
+              <a:rPr lang="en-US" b="1"/>
               <a:t>Reduced Cycle Time</a:t>
             </a:r>
           </a:p>
           <a:p>
             <a:r>
-              <a:rPr lang="en-US" dirty="0"/>
+              <a:rPr lang="en-US"/>
               <a:t>Multi-step processes that took days (onboarding, compliance checks, report generation) are completed in minutes. JPMorgan’s COIN agent reviews 12,000 commercial loan agreements in seconds vs. 360,000 lawyer-hours annually.</a:t>
             </a:r>
           </a:p>
           <a:p>
             <a:r>
-              <a:rPr lang="en-US" b="1" dirty="0"/>
+              <a:rPr lang="en-US" b="1"/>
               <a:t>24/7 Operations</a:t>
             </a:r>
           </a:p>
           <a:p>
             <a:r>
-              <a:rPr lang="en-US" dirty="0"/>
+              <a:rPr lang="en-US"/>
               <a:t>Agents don’t sleep, take breaks, or go on vacation. IT incident resolution, customer support, and data monitoring run around the clock without staffing overhead.</a:t>
             </a:r>
           </a:p>
           <a:p>
             <a:r>
-              <a:rPr lang="en-US" b="1" dirty="0"/>
+              <a:rPr lang="en-US" b="1"/>
               <a:t>Better, Faster Decisions</a:t>
             </a:r>
           </a:p>
           <a:p>
             <a:r>
-              <a:rPr lang="en-US" dirty="0"/>
+              <a:rPr lang="en-US"/>
               <a:t>Agents process more data signals simultaneously than any human team. A pricing agent tracks 500 SKUs across 10 competitors in real time — impossible for a human analyst.</a:t>
             </a:r>
           </a:p>
           <a:p>
             <a:r>
-              <a:rPr lang="en-US" b="1" dirty="0"/>
+              <a:rPr lang="en-US" b="1"/>
               <a:t>Continuous Learning</a:t>
             </a:r>
           </a:p>
           <a:p>
             <a:r>
-              <a:rPr lang="en-US" dirty="0"/>
+              <a:rPr lang="en-US"/>
               <a:t>Every interaction is logged and can be used to fine-tune future behavior. Agents improve over time, adapting to edge cases and new business rules without re-engineering.</a:t>
             </a:r>
           </a:p>
@@ -3418,7 +3381,7 @@
 </file>
 
 <file path=ppt/slides/slide12.xml><?xml version="1.0" encoding="utf-8"?>
-<p:sld xmlns:a="http://schemas.openxmlformats.org/drawingml/2006/main" xmlns:r="http://schemas.openxmlformats.org/officeDocument/2006/relationships" xmlns:p="http://schemas.openxmlformats.org/presentationml/2006/main">
+<p:sld xmlns:a="http://schemas.openxmlformats.org/drawingml/2006/main" xmlns:p="http://schemas.openxmlformats.org/presentationml/2006/main" xmlns:r="http://schemas.openxmlformats.org/officeDocument/2006/relationships">
   <p:cSld>
     <p:spTree>
       <p:nvGrpSpPr>
@@ -3426,14 +3389,7 @@
         <p:cNvGrpSpPr/>
         <p:nvPr/>
       </p:nvGrpSpPr>
-      <p:grpSpPr>
-        <a:xfrm>
-          <a:off x="0" y="0"/>
-          <a:ext cx="0" cy="0"/>
-          <a:chOff x="0" y="0"/>
-          <a:chExt cx="0" cy="0"/>
-        </a:xfrm>
-      </p:grpSpPr>
+      <p:grpSpPr/>
       <p:sp>
         <p:nvSpPr>
           <p:cNvPr id="2" name="Title 1"/>
@@ -3465,56 +3421,49 @@
             <p:ph idx="1"/>
           </p:nvPr>
         </p:nvSpPr>
-        <p:spPr>
-          <a:xfrm>
-            <a:off x="378542" y="1059426"/>
-            <a:ext cx="8229600" cy="4525963"/>
-          </a:xfrm>
-        </p:spPr>
-        <p:txBody>
-          <a:bodyPr>
-            <a:normAutofit fontScale="62500" lnSpcReduction="20000"/>
-          </a:bodyPr>
-          <a:lstStyle/>
-          <a:p>
-            <a:r>
-              <a:rPr lang="en-US" b="1" dirty="0"/>
+        <p:spPr/>
+        <p:txBody>
+          <a:bodyPr/>
+          <a:lstStyle/>
+          <a:p>
+            <a:r>
+              <a:rPr lang="en-US" b="1"/>
               <a:t>Hallucinations &amp; Reliability</a:t>
             </a:r>
           </a:p>
           <a:p>
             <a:r>
-              <a:rPr lang="en-US" dirty="0"/>
+              <a:rPr lang="en-US"/>
               <a:t>LLMs can confidently generate incorrect outputs. In agentic settings, one wrong reasoning step cascades into wrong actions. Mitigation: retrieval-augmented generation (RAG), structured output validation, and human checkpoints on critical decisions.</a:t>
             </a:r>
           </a:p>
           <a:p>
             <a:r>
-              <a:rPr lang="en-US" b="1" dirty="0"/>
+              <a:rPr lang="en-US" b="1"/>
               <a:t>Governance &amp; Auditability</a:t>
             </a:r>
           </a:p>
           <a:p>
             <a:r>
-              <a:rPr lang="en-US" dirty="0"/>
+              <a:rPr lang="en-US"/>
               <a:t>Regulators demand explainability. When an agent denies a loan or flags fraud, you need a complete audit trail of every decision, tool call, and data source used. This requires logging at every step.</a:t>
             </a:r>
           </a:p>
           <a:p>
             <a:r>
-              <a:rPr lang="en-US" b="1" dirty="0"/>
+              <a:rPr lang="en-US" b="1"/>
               <a:t>Trust &amp; Compliance</a:t>
             </a:r>
           </a:p>
           <a:p>
             <a:r>
-              <a:rPr lang="en-US" dirty="0"/>
+              <a:rPr lang="en-US"/>
               <a:t>Agents that take actions (send emails, update records, execute transactions) require strict permission boundaries. “Prompt injection” attacks — where malicious input hijacks agent behavior — are an emerging threat vector.</a:t>
             </a:r>
           </a:p>
           <a:p>
             <a:r>
-              <a:rPr lang="en-US" i="1" dirty="0"/>
+              <a:rPr lang="en-US" i="1"/>
               <a:t>“The biggest risk isn’t that AI does something malicious — it’s that it does something plausible but wrong at scale.” — AI Safety researcher, 2024</a:t>
             </a:r>
           </a:p>
@@ -3529,7 +3478,7 @@
 </file>
 
 <file path=ppt/slides/slide13.xml><?xml version="1.0" encoding="utf-8"?>
-<p:sld xmlns:a="http://schemas.openxmlformats.org/drawingml/2006/main" xmlns:r="http://schemas.openxmlformats.org/officeDocument/2006/relationships" xmlns:p="http://schemas.openxmlformats.org/presentationml/2006/main">
+<p:sld xmlns:a="http://schemas.openxmlformats.org/drawingml/2006/main" xmlns:p="http://schemas.openxmlformats.org/presentationml/2006/main" xmlns:r="http://schemas.openxmlformats.org/officeDocument/2006/relationships">
   <p:cSld>
     <p:spTree>
       <p:nvGrpSpPr>
@@ -3537,14 +3486,7 @@
         <p:cNvGrpSpPr/>
         <p:nvPr/>
       </p:nvGrpSpPr>
-      <p:grpSpPr>
-        <a:xfrm>
-          <a:off x="0" y="0"/>
-          <a:ext cx="0" cy="0"/>
-          <a:chOff x="0" y="0"/>
-          <a:chExt cx="0" cy="0"/>
-        </a:xfrm>
-      </p:grpSpPr>
+      <p:grpSpPr/>
       <p:sp>
         <p:nvSpPr>
           <p:cNvPr id="2" name="Title 1"/>
@@ -3576,62 +3518,55 @@
             <p:ph idx="1"/>
           </p:nvPr>
         </p:nvSpPr>
-        <p:spPr>
-          <a:xfrm>
-            <a:off x="358877" y="1039762"/>
-            <a:ext cx="8229600" cy="4525963"/>
-          </a:xfrm>
-        </p:spPr>
-        <p:txBody>
-          <a:bodyPr>
-            <a:normAutofit fontScale="55000" lnSpcReduction="20000"/>
-          </a:bodyPr>
-          <a:lstStyle/>
-          <a:p>
-            <a:r>
-              <a:rPr lang="en-US" b="1" dirty="0"/>
+        <p:spPr/>
+        <p:txBody>
+          <a:bodyPr/>
+          <a:lstStyle/>
+          <a:p>
+            <a:r>
+              <a:rPr lang="en-US" b="1"/>
               <a:t>Human-in-the-Loop (HITL)</a:t>
             </a:r>
           </a:p>
           <a:p>
             <a:r>
-              <a:rPr lang="en-US" dirty="0"/>
+              <a:rPr lang="en-US"/>
               <a:t>Not all decisions should be fully autonomous. Define “confidence thresholds”: actions above 95% confidence execute automatically; below that, an alert is sent to a human approver. Example: refunds under $500 auto-approved, over $500 require manager sign-off.</a:t>
             </a:r>
           </a:p>
           <a:p>
             <a:r>
-              <a:rPr lang="en-US" b="1" dirty="0"/>
+              <a:rPr lang="en-US" b="1"/>
               <a:t>Audit Trails &amp; Explainability</a:t>
             </a:r>
           </a:p>
           <a:p>
             <a:r>
-              <a:rPr lang="en-US" dirty="0"/>
+              <a:rPr lang="en-US"/>
               <a:t>Every agent action must be logged: what data was accessed, what tools were called, what decision was made, and why. Use structured event logs compatible with your SIEM or compliance platform (e.g., Splunk, Datadog).</a:t>
             </a:r>
           </a:p>
           <a:p>
             <a:r>
-              <a:rPr lang="en-US" b="1" dirty="0"/>
+              <a:rPr lang="en-US" b="1"/>
               <a:t>Role-Based Access Control (RBAC)</a:t>
             </a:r>
           </a:p>
           <a:p>
             <a:r>
-              <a:rPr lang="en-US" dirty="0"/>
+              <a:rPr lang="en-US"/>
               <a:t>Agents operate under the principle of least privilege. A customer support agent can read CRM data but cannot write to the finance system. Scope permissions to the minimum required for each agent’s function.</a:t>
             </a:r>
           </a:p>
           <a:p>
             <a:r>
-              <a:rPr lang="en-US" b="1" dirty="0"/>
+              <a:rPr lang="en-US" b="1"/>
               <a:t>Governance Framework Example</a:t>
             </a:r>
           </a:p>
           <a:p>
             <a:r>
-              <a:rPr lang="en-US" i="1" dirty="0"/>
+              <a:rPr lang="en-US" i="1"/>
               <a:t>AWS, Azure, and Google Cloud all offer AI governance toolkits with model cards, usage policies, and monitoring dashboards — adopt these as your baseline, then layer business-specific rules on top.</a:t>
             </a:r>
           </a:p>
@@ -3646,7 +3581,7 @@
 </file>
 
 <file path=ppt/slides/slide14.xml><?xml version="1.0" encoding="utf-8"?>
-<p:sld xmlns:a="http://schemas.openxmlformats.org/drawingml/2006/main" xmlns:r="http://schemas.openxmlformats.org/officeDocument/2006/relationships" xmlns:p="http://schemas.openxmlformats.org/presentationml/2006/main">
+<p:sld xmlns:a="http://schemas.openxmlformats.org/drawingml/2006/main" xmlns:p="http://schemas.openxmlformats.org/presentationml/2006/main" xmlns:r="http://schemas.openxmlformats.org/officeDocument/2006/relationships">
   <p:cSld>
     <p:spTree>
       <p:nvGrpSpPr>
@@ -3654,14 +3589,7 @@
         <p:cNvGrpSpPr/>
         <p:nvPr/>
       </p:nvGrpSpPr>
-      <p:grpSpPr>
-        <a:xfrm>
-          <a:off x="0" y="0"/>
-          <a:ext cx="0" cy="0"/>
-          <a:chOff x="0" y="0"/>
-          <a:chExt cx="0" cy="0"/>
-        </a:xfrm>
-      </p:grpSpPr>
+      <p:grpSpPr/>
       <p:sp>
         <p:nvSpPr>
           <p:cNvPr id="2" name="Title 1"/>
@@ -3693,56 +3621,49 @@
             <p:ph idx="1"/>
           </p:nvPr>
         </p:nvSpPr>
-        <p:spPr>
-          <a:xfrm>
-            <a:off x="457200" y="1166018"/>
-            <a:ext cx="8229600" cy="4525963"/>
-          </a:xfrm>
-        </p:spPr>
-        <p:txBody>
-          <a:bodyPr>
-            <a:normAutofit fontScale="62500" lnSpcReduction="20000"/>
-          </a:bodyPr>
-          <a:lstStyle/>
-          <a:p>
-            <a:r>
-              <a:rPr lang="en-US" b="1" dirty="0"/>
+        <p:spPr/>
+        <p:txBody>
+          <a:bodyPr/>
+          <a:lstStyle/>
+          <a:p>
+            <a:r>
+              <a:rPr lang="en-US" b="1"/>
               <a:t>Phase 1: Assistive AI (Months 0-6)</a:t>
             </a:r>
           </a:p>
           <a:p>
             <a:r>
-              <a:rPr lang="en-US" dirty="0"/>
+              <a:rPr lang="en-US"/>
               <a:t>AI augments humans without taking autonomous action. Example: Copilot drafts emails, agents surface relevant KB articles, dashboards auto-populate. Human reviews every output before it goes live. Low risk, fast ROI.</a:t>
             </a:r>
           </a:p>
           <a:p>
             <a:r>
-              <a:rPr lang="en-US" b="1" dirty="0"/>
+              <a:rPr lang="en-US" b="1"/>
               <a:t>Phase 2: Semi-Agentic (Months 6-18)</a:t>
             </a:r>
           </a:p>
           <a:p>
             <a:r>
-              <a:rPr lang="en-US" dirty="0"/>
+              <a:rPr lang="en-US"/>
               <a:t>Agents handle defined workflows end-to-end for low-risk tasks. Example: auto-close resolved tickets, auto-approve routine purchase orders under a threshold. Humans approve exceptions only.</a:t>
             </a:r>
           </a:p>
           <a:p>
             <a:r>
-              <a:rPr lang="en-US" b="1" dirty="0"/>
+              <a:rPr lang="en-US" b="1"/>
               <a:t>Phase 3: Fully Agentic (Month 18+)</a:t>
             </a:r>
           </a:p>
           <a:p>
             <a:r>
-              <a:rPr lang="en-US" dirty="0"/>
+              <a:rPr lang="en-US"/>
               <a:t>Agents run entire business processes with minimal oversight. Multi-agent pipelines handle end-to-end: customer onboarding, fraud investigation, campaign management. Governance and audit infrastructure must be mature before this phase.</a:t>
             </a:r>
           </a:p>
           <a:p>
             <a:r>
-              <a:rPr lang="en-US" i="1" dirty="0"/>
+              <a:rPr lang="en-US" i="1"/>
               <a:t>Key success factor: start with a high-volume, well-defined process (e.g., IT incident triage) rather than a complex, judgment-heavy one.</a:t>
             </a:r>
           </a:p>
@@ -3757,7 +3678,7 @@
 </file>
 
 <file path=ppt/slides/slide15.xml><?xml version="1.0" encoding="utf-8"?>
-<p:sld xmlns:a="http://schemas.openxmlformats.org/drawingml/2006/main" xmlns:r="http://schemas.openxmlformats.org/officeDocument/2006/relationships" xmlns:p="http://schemas.openxmlformats.org/presentationml/2006/main">
+<p:sld xmlns:a="http://schemas.openxmlformats.org/drawingml/2006/main" xmlns:p="http://schemas.openxmlformats.org/presentationml/2006/main" xmlns:r="http://schemas.openxmlformats.org/officeDocument/2006/relationships">
   <p:cSld>
     <p:spTree>
       <p:nvGrpSpPr>
@@ -3765,14 +3686,7 @@
         <p:cNvGrpSpPr/>
         <p:nvPr/>
       </p:nvGrpSpPr>
-      <p:grpSpPr>
-        <a:xfrm>
-          <a:off x="0" y="0"/>
-          <a:ext cx="0" cy="0"/>
-          <a:chOff x="0" y="0"/>
-          <a:chExt cx="0" cy="0"/>
-        </a:xfrm>
-      </p:grpSpPr>
+      <p:grpSpPr/>
       <p:sp>
         <p:nvSpPr>
           <p:cNvPr id="2" name="Title 1"/>
@@ -3804,88 +3718,49 @@
             <p:ph idx="1"/>
           </p:nvPr>
         </p:nvSpPr>
-        <p:spPr>
-          <a:xfrm>
-            <a:off x="368710" y="1059426"/>
-            <a:ext cx="8229600" cy="4525963"/>
-          </a:xfrm>
-        </p:spPr>
-        <p:txBody>
-          <a:bodyPr>
-            <a:normAutofit fontScale="55000" lnSpcReduction="20000"/>
-          </a:bodyPr>
-          <a:lstStyle/>
-          <a:p>
-            <a:r>
-              <a:rPr lang="en-US" b="1" dirty="0"/>
+        <p:spPr/>
+        <p:txBody>
+          <a:bodyPr/>
+          <a:lstStyle/>
+          <a:p>
+            <a:r>
+              <a:rPr lang="en-US" b="1"/>
               <a:t>Build (Custom Development)</a:t>
             </a:r>
           </a:p>
           <a:p>
             <a:r>
-              <a:rPr lang="en-US" dirty="0"/>
-              <a:t>Full control over data privacy, model choice, and integration. Best for highly regulated industries (BFSI, healthcare) or proprietary workflows. Requires ML engineering talent and 6-18 months to production. Frameworks: </a:t>
-            </a:r>
-            <a:r>
-              <a:rPr lang="en-US" dirty="0" err="1"/>
-              <a:t>LangChain</a:t>
-            </a:r>
-            <a:r>
-              <a:rPr lang="en-US" dirty="0"/>
-              <a:t>, LlamaIndex, </a:t>
-            </a:r>
-            <a:r>
-              <a:rPr lang="en-US" dirty="0" err="1"/>
-              <a:t>AutoGen</a:t>
-            </a:r>
-            <a:r>
-              <a:rPr lang="en-US" dirty="0"/>
-              <a:t>.</a:t>
-            </a:r>
-          </a:p>
-          <a:p>
-            <a:r>
-              <a:rPr lang="en-US" b="1" dirty="0"/>
+              <a:rPr lang="en-US"/>
+              <a:t>Full control over data privacy, model choice, and integration. Best for highly regulated industries (BFSI, healthcare) or proprietary workflows. Requires ML engineering talent and 6-18 months to production. Frameworks: LangChain, LlamaIndex, AutoGen.</a:t>
+            </a:r>
+          </a:p>
+          <a:p>
+            <a:r>
+              <a:rPr lang="en-US" b="1"/>
               <a:t>Buy (SaaS / Platform)</a:t>
             </a:r>
           </a:p>
           <a:p>
             <a:r>
-              <a:rPr lang="en-US" dirty="0"/>
-              <a:t>Faster time-to-value (weeks, not months). Examples: Salesforce </a:t>
-            </a:r>
-            <a:r>
-              <a:rPr lang="en-US" dirty="0" err="1"/>
-              <a:t>Agentforce</a:t>
-            </a:r>
-            <a:r>
-              <a:rPr lang="en-US" dirty="0"/>
-              <a:t> for CRM workflows, ServiceNow AI Agents for ITSM, Microsoft Copilot Studio for business automation. Trade-off: less customization, vendor lock-in risk.</a:t>
-            </a:r>
-          </a:p>
-          <a:p>
-            <a:r>
-              <a:rPr lang="en-US" b="1" dirty="0"/>
+              <a:rPr lang="en-US"/>
+              <a:t>Faster time-to-value (weeks, not months). Examples: Salesforce Agentforce for CRM workflows, ServiceNow AI Agents for ITSM, Microsoft Copilot Studio for business automation. Trade-off: less customization, vendor lock-in risk.</a:t>
+            </a:r>
+          </a:p>
+          <a:p>
+            <a:r>
+              <a:rPr lang="en-US" b="1"/>
               <a:t>Recommendation: Hybrid Approach</a:t>
             </a:r>
           </a:p>
           <a:p>
             <a:r>
-              <a:rPr lang="en-US" dirty="0"/>
-              <a:t>Buy for commodity workflows (support, HR, IT). Build for competitive differentiators (proprietary pricing models, unique risk algorithms). Use open-source foundations (</a:t>
-            </a:r>
-            <a:r>
-              <a:rPr lang="en-US" dirty="0" err="1"/>
-              <a:t>LLaMA</a:t>
-            </a:r>
-            <a:r>
-              <a:rPr lang="en-US" dirty="0"/>
-              <a:t>, Mistral) to reduce licensing costs at scale.</a:t>
-            </a:r>
-          </a:p>
-          <a:p>
-            <a:r>
-              <a:rPr lang="en-US" i="1" dirty="0"/>
+              <a:rPr lang="en-US"/>
+              <a:t>Buy for commodity workflows (support, HR, IT). Build for competitive differentiators (proprietary pricing models, unique risk algorithms). Use open-source foundations (LLaMA, Mistral) to reduce licensing costs at scale.</a:t>
+            </a:r>
+          </a:p>
+          <a:p>
+            <a:r>
+              <a:rPr lang="en-US" i="1"/>
               <a:t>“Don’t build what you can buy; don’t buy what defines your competitive edge.”</a:t>
             </a:r>
           </a:p>
@@ -3900,7 +3775,7 @@
 </file>
 
 <file path=ppt/slides/slide16.xml><?xml version="1.0" encoding="utf-8"?>
-<p:sld xmlns:a="http://schemas.openxmlformats.org/drawingml/2006/main" xmlns:r="http://schemas.openxmlformats.org/officeDocument/2006/relationships" xmlns:p="http://schemas.openxmlformats.org/presentationml/2006/main">
+<p:sld xmlns:a="http://schemas.openxmlformats.org/drawingml/2006/main" xmlns:p="http://schemas.openxmlformats.org/presentationml/2006/main" xmlns:r="http://schemas.openxmlformats.org/officeDocument/2006/relationships">
   <p:cSld>
     <p:spTree>
       <p:nvGrpSpPr>
@@ -3908,14 +3783,7 @@
         <p:cNvGrpSpPr/>
         <p:nvPr/>
       </p:nvGrpSpPr>
-      <p:grpSpPr>
-        <a:xfrm>
-          <a:off x="0" y="0"/>
-          <a:ext cx="0" cy="0"/>
-          <a:chOff x="0" y="0"/>
-          <a:chExt cx="0" cy="0"/>
-        </a:xfrm>
-      </p:grpSpPr>
+      <p:grpSpPr/>
       <p:sp>
         <p:nvSpPr>
           <p:cNvPr id="2" name="Title 1"/>
@@ -3924,88 +3792,106 @@
           </p:cNvSpPr>
           <p:nvPr>
             <p:ph type="title"/>
+          </p:nvPr>
+        </p:nvSpPr>
+        <p:spPr/>
+        <p:txBody>
+          <a:bodyPr/>
+          <a:lstStyle/>
+          <a:p>
+            <a:r>
+              <a:t>Organic Chemistry Analogy</a:t>
+            </a:r>
+          </a:p>
+        </p:txBody>
+      </p:sp>
+      <p:sp>
+        <p:nvSpPr>
+          <p:cNvPr id="3" name="Content Placeholder 2"/>
+          <p:cNvSpPr>
+            <a:spLocks noGrp="1"/>
+          </p:cNvSpPr>
+          <p:nvPr>
+            <p:ph idx="1"/>
           </p:nvPr>
         </p:nvSpPr>
         <p:spPr>
           <a:xfrm>
-            <a:off x="358878" y="274638"/>
-            <a:ext cx="8229600" cy="1143000"/>
+            <a:off x="457200" y="1600200"/>
+            <a:ext cx="3886200" cy="4525963"/>
           </a:xfrm>
         </p:spPr>
         <p:txBody>
-          <a:bodyPr/>
-          <a:lstStyle/>
-          <a:p>
-            <a:r>
-              <a:rPr dirty="0"/>
-              <a:t>Organic Chemistry Analogy</a:t>
-            </a:r>
-          </a:p>
-        </p:txBody>
-      </p:sp>
-      <p:sp>
-        <p:nvSpPr>
-          <p:cNvPr id="3" name="Content Placeholder 2"/>
-          <p:cNvSpPr>
-            <a:spLocks noGrp="1"/>
-          </p:cNvSpPr>
-          <p:nvPr>
-            <p:ph idx="1"/>
-          </p:nvPr>
-        </p:nvSpPr>
+          <a:bodyPr>
+            <a:normAutofit/>
+          </a:bodyPr>
+          <a:lstStyle/>
+          <a:p>
+            <a:r>
+              <a:rPr lang="en-US" b="1"/>
+              <a:t>Agents = Atoms</a:t>
+            </a:r>
+            <a:r>
+              <a:rPr lang="en-US"/>
+              <a:t xml:space="preserve"> — Simple, specialized, composable units with one job each.</a:t>
+            </a:r>
+          </a:p>
+          <a:p>
+            <a:r>
+              <a:rPr lang="en-US" b="1"/>
+              <a:t>Communication = Bonds</a:t>
+            </a:r>
+            <a:r>
+              <a:rPr lang="en-US"/>
+              <a:t xml:space="preserve"> — Agents connect via structured JSON messaging (sync or async).</a:t>
+            </a:r>
+          </a:p>
+          <a:p>
+            <a:r>
+              <a:rPr lang="en-US" b="1"/>
+              <a:t>Multi-Agent = Molecule</a:t>
+            </a:r>
+            <a:r>
+              <a:rPr lang="en-US"/>
+              <a:t xml:space="preserve"> — Research + Code + QA agents combine into a capable “Dev Team.”</a:t>
+            </a:r>
+          </a:p>
+          <a:p>
+            <a:r>
+              <a:rPr lang="en-US" b="1"/>
+              <a:t>Tools = Functional Groups</a:t>
+            </a:r>
+            <a:r>
+              <a:rPr lang="en-US"/>
+              <a:t xml:space="preserve"> — Attach search, code, or email tools to define what an agent can do.</a:t>
+            </a:r>
+          </a:p>
+        </p:txBody>
+      </p:sp>
+      <p:pic>
+        <p:nvPicPr>
+          <p:cNvPr id="4" name="ChemAnalogy" descr="Organic Chemistry Analogy Diagram"/>
+          <p:cNvPicPr>
+            <a:picLocks noChangeAspect="1"/>
+          </p:cNvPicPr>
+          <p:nvPr/>
+        </p:nvPicPr>
+        <p:blipFill>
+          <a:blip r:embed="rId2"/>
+          <a:stretch>
+            <a:fillRect/>
+          </a:stretch>
+        </p:blipFill>
         <p:spPr>
           <a:xfrm>
-            <a:off x="457200" y="1417638"/>
-            <a:ext cx="8229600" cy="4525963"/>
+            <a:off x="4572000" y="1371600"/>
+            <a:ext cx="4343400" cy="3040380"/>
           </a:xfrm>
+          <a:prstGeom prst="rect">
+            <a:avLst/>
+          </a:prstGeom>
         </p:spPr>
-        <p:txBody>
-          <a:bodyPr>
-            <a:normAutofit fontScale="92500"/>
-          </a:bodyPr>
-          <a:lstStyle/>
-          <a:p>
-            <a:r>
-              <a:rPr lang="en-US" b="1" dirty="0"/>
-              <a:t>Agents = Atoms</a:t>
-            </a:r>
-            <a:r>
-              <a:rPr lang="en-US" dirty="0"/>
-              <a:t> — Simple, specialized, composable units with one job each.</a:t>
-            </a:r>
-          </a:p>
-          <a:p>
-            <a:r>
-              <a:rPr lang="en-US" b="1" dirty="0"/>
-              <a:t>Communication = Bonds</a:t>
-            </a:r>
-            <a:r>
-              <a:rPr lang="en-US" dirty="0"/>
-              <a:t> — Agents connect via structured JSON messaging (sync or async).</a:t>
-            </a:r>
-          </a:p>
-          <a:p>
-            <a:r>
-              <a:rPr lang="en-US" b="1" dirty="0"/>
-              <a:t>Multi-Agent = Molecule</a:t>
-            </a:r>
-            <a:r>
-              <a:rPr lang="en-US" dirty="0"/>
-              <a:t> — Research + Code + QA agents combine into a capable “Dev Team.”</a:t>
-            </a:r>
-          </a:p>
-          <a:p>
-            <a:r>
-              <a:rPr lang="en-US" b="1" dirty="0"/>
-              <a:t>Tools = Functional Groups</a:t>
-            </a:r>
-            <a:r>
-              <a:rPr lang="en-US" dirty="0"/>
-              <a:t> — Attach search, code, or email tools to define what an agent can do.</a:t>
-            </a:r>
-          </a:p>
-        </p:txBody>
-      </p:sp>
+      </p:pic>
     </p:spTree>
   </p:cSld>
   <p:clrMapOvr>
@@ -4015,7 +3901,7 @@
 </file>
 
 <file path=ppt/slides/slide17.xml><?xml version="1.0" encoding="utf-8"?>
-<p:sld xmlns:a="http://schemas.openxmlformats.org/drawingml/2006/main" xmlns:r="http://schemas.openxmlformats.org/officeDocument/2006/relationships" xmlns:p="http://schemas.openxmlformats.org/presentationml/2006/main">
+<p:sld xmlns:a="http://schemas.openxmlformats.org/drawingml/2006/main" xmlns:p="http://schemas.openxmlformats.org/presentationml/2006/main" xmlns:r="http://schemas.openxmlformats.org/officeDocument/2006/relationships">
   <p:cSld>
     <p:spTree>
       <p:nvGrpSpPr>
@@ -4023,14 +3909,7 @@
         <p:cNvGrpSpPr/>
         <p:nvPr/>
       </p:nvGrpSpPr>
-      <p:grpSpPr>
-        <a:xfrm>
-          <a:off x="0" y="0"/>
-          <a:ext cx="0" cy="0"/>
-          <a:chOff x="0" y="0"/>
-          <a:chExt cx="0" cy="0"/>
-        </a:xfrm>
-      </p:grpSpPr>
+      <p:grpSpPr/>
       <p:sp>
         <p:nvSpPr>
           <p:cNvPr id="2" name="Title 1"/>
@@ -4041,18 +3920,12 @@
             <p:ph type="title"/>
           </p:nvPr>
         </p:nvSpPr>
-        <p:spPr>
-          <a:xfrm>
-            <a:off x="339213" y="0"/>
-            <a:ext cx="8229600" cy="1143000"/>
-          </a:xfrm>
-        </p:spPr>
-        <p:txBody>
-          <a:bodyPr/>
-          <a:lstStyle/>
-          <a:p>
-            <a:r>
-              <a:rPr dirty="0"/>
+        <p:spPr/>
+        <p:txBody>
+          <a:bodyPr/>
+          <a:lstStyle/>
+          <a:p>
+            <a:r>
               <a:t>Key Takeaways</a:t>
             </a:r>
           </a:p>
@@ -4068,62 +3941,55 @@
             <p:ph idx="1"/>
           </p:nvPr>
         </p:nvSpPr>
-        <p:spPr>
-          <a:xfrm>
-            <a:off x="457200" y="1276300"/>
-            <a:ext cx="8229600" cy="4525963"/>
-          </a:xfrm>
-        </p:spPr>
-        <p:txBody>
-          <a:bodyPr>
-            <a:normAutofit fontScale="62500" lnSpcReduction="20000"/>
-          </a:bodyPr>
-          <a:lstStyle/>
-          <a:p>
-            <a:r>
-              <a:rPr lang="en-US" b="1" dirty="0"/>
+        <p:spPr/>
+        <p:txBody>
+          <a:bodyPr/>
+          <a:lstStyle/>
+          <a:p>
+            <a:r>
+              <a:rPr lang="en-US" b="1"/>
               <a:t>AI That Acts, Not Just Answers</a:t>
             </a:r>
           </a:p>
           <a:p>
             <a:r>
-              <a:rPr lang="en-US" dirty="0"/>
+              <a:rPr lang="en-US"/>
               <a:t>The shift from “AI as a chatbot” to “AI as a worker” is the defining enterprise trend of 2025-2030. Agentic AI closes the loop between insight and action — it doesn’t just tell you what to do, it does it.</a:t>
             </a:r>
           </a:p>
           <a:p>
             <a:r>
-              <a:rPr lang="en-US" b="1" dirty="0"/>
+              <a:rPr lang="en-US" b="1"/>
               <a:t>Enterprise Transformation is Underway</a:t>
             </a:r>
           </a:p>
           <a:p>
             <a:r>
-              <a:rPr lang="en-US" dirty="0"/>
+              <a:rPr lang="en-US"/>
               <a:t>Leading companies in BFSI, retail, and tech are already deploying agentic pipelines in production. Those who wait for “the technology to mature” will face a 2-3 year competitive gap that is very hard to close.</a:t>
             </a:r>
           </a:p>
           <a:p>
             <a:r>
-              <a:rPr lang="en-US" b="1" dirty="0"/>
+              <a:rPr lang="en-US" b="1"/>
               <a:t>Early Adoption Advantage</a:t>
             </a:r>
           </a:p>
           <a:p>
             <a:r>
-              <a:rPr lang="en-US" dirty="0"/>
+              <a:rPr lang="en-US"/>
               <a:t>First-movers gain compounding advantages: more interaction data → better-trained agents → faster operations → lower costs. The ROI on an agent improves every month it runs.</a:t>
             </a:r>
           </a:p>
           <a:p>
             <a:r>
-              <a:rPr lang="en-US" b="1" dirty="0"/>
+              <a:rPr lang="en-US" b="1"/>
               <a:t>Start Small, Scale Fast</a:t>
             </a:r>
           </a:p>
           <a:p>
             <a:r>
-              <a:rPr lang="en-US" i="1" dirty="0"/>
+              <a:rPr lang="en-US" i="1"/>
               <a:t>Pick one high-volume, well-defined process. Prove ROI in 90 days. Then scale to adjacent workflows. You don’t need a multi-year transformation program — you need a focused pilot.</a:t>
             </a:r>
           </a:p>
@@ -4138,7 +4004,7 @@
 </file>
 
 <file path=ppt/slides/slide18.xml><?xml version="1.0" encoding="utf-8"?>
-<p:sld xmlns:a="http://schemas.openxmlformats.org/drawingml/2006/main" xmlns:r="http://schemas.openxmlformats.org/officeDocument/2006/relationships" xmlns:p="http://schemas.openxmlformats.org/presentationml/2006/main">
+<p:sld xmlns:a="http://schemas.openxmlformats.org/drawingml/2006/main" xmlns:p="http://schemas.openxmlformats.org/presentationml/2006/main" xmlns:r="http://schemas.openxmlformats.org/officeDocument/2006/relationships">
   <p:cSld>
     <p:spTree>
       <p:nvGrpSpPr>
@@ -4146,14 +4012,7 @@
         <p:cNvGrpSpPr/>
         <p:nvPr/>
       </p:nvGrpSpPr>
-      <p:grpSpPr>
-        <a:xfrm>
-          <a:off x="0" y="0"/>
-          <a:ext cx="0" cy="0"/>
-          <a:chOff x="0" y="0"/>
-          <a:chExt cx="0" cy="0"/>
-        </a:xfrm>
-      </p:grpSpPr>
+      <p:grpSpPr/>
       <p:sp>
         <p:nvSpPr>
           <p:cNvPr id="2" name="Title 1"/>
@@ -4164,12 +4023,7 @@
             <p:ph type="title"/>
           </p:nvPr>
         </p:nvSpPr>
-        <p:spPr>
-          <a:xfrm>
-            <a:off x="329381" y="-221328"/>
-            <a:ext cx="8229600" cy="1143000"/>
-          </a:xfrm>
-        </p:spPr>
+        <p:spPr/>
         <p:txBody>
           <a:bodyPr/>
           <a:lstStyle/>
@@ -4190,56 +4044,49 @@
             <p:ph idx="1"/>
           </p:nvPr>
         </p:nvSpPr>
-        <p:spPr>
-          <a:xfrm>
-            <a:off x="260555" y="863344"/>
-            <a:ext cx="8229600" cy="4525963"/>
-          </a:xfrm>
-        </p:spPr>
-        <p:txBody>
-          <a:bodyPr>
-            <a:normAutofit fontScale="70000" lnSpcReduction="20000"/>
-          </a:bodyPr>
-          <a:lstStyle/>
-          <a:p>
-            <a:r>
-              <a:rPr lang="en-US" b="1" dirty="0"/>
+        <p:spPr/>
+        <p:txBody>
+          <a:bodyPr/>
+          <a:lstStyle/>
+          <a:p>
+            <a:r>
+              <a:rPr lang="en-US" b="1"/>
               <a:t>AI is Moving from Tool to Workforce</a:t>
             </a:r>
           </a:p>
           <a:p>
             <a:r>
-              <a:rPr lang="en-US" dirty="0"/>
+              <a:rPr lang="en-US"/>
               <a:t>We are entering an era where AI agents will sit alongside human employees in org charts — not replacing them, but augmenting their capacity to do more, faster, with greater consistency.</a:t>
             </a:r>
           </a:p>
           <a:p>
             <a:r>
-              <a:rPr lang="en-US" b="1" dirty="0"/>
+              <a:rPr lang="en-US" b="1"/>
               <a:t>The Question is No Longer “If”</a:t>
             </a:r>
           </a:p>
           <a:p>
             <a:r>
-              <a:rPr lang="en-US" dirty="0"/>
+              <a:rPr lang="en-US"/>
               <a:t>It’s “how fast” and “how responsibly.” Every enterprise has processes that are repetitive, data-rich, and rule-governed — these are ideal agent candidates available today.</a:t>
             </a:r>
           </a:p>
           <a:p>
             <a:r>
-              <a:rPr lang="en-US" b="1" dirty="0"/>
+              <a:rPr lang="en-US" b="1"/>
               <a:t>Your Next Step</a:t>
             </a:r>
           </a:p>
           <a:p>
             <a:r>
-              <a:rPr lang="en-US" dirty="0"/>
+              <a:rPr lang="en-US"/>
               <a:t>1. Identify one candidate process (high volume, structured, measurable). 2. Run a 30-day proof-of-concept with a focused agent. 3. Measure cycle time, cost, and quality vs. baseline. 4. Present findings to leadership and secure Phase 2 budget.</a:t>
             </a:r>
           </a:p>
           <a:p>
             <a:r>
-              <a:rPr lang="en-US" i="1" dirty="0"/>
+              <a:rPr lang="en-US" i="1"/>
               <a:t>“The future belongs to organizations that treat AI not as a feature, but as a fundamental operating capability.”</a:t>
             </a:r>
           </a:p>
@@ -4254,7 +4101,7 @@
 </file>
 
 <file path=ppt/slides/slide2.xml><?xml version="1.0" encoding="utf-8"?>
-<p:sld xmlns:a="http://schemas.openxmlformats.org/drawingml/2006/main" xmlns:r="http://schemas.openxmlformats.org/officeDocument/2006/relationships" xmlns:p="http://schemas.openxmlformats.org/presentationml/2006/main">
+<p:sld xmlns:a="http://schemas.openxmlformats.org/drawingml/2006/main" xmlns:p="http://schemas.openxmlformats.org/presentationml/2006/main" xmlns:r="http://schemas.openxmlformats.org/officeDocument/2006/relationships">
   <p:cSld>
     <p:spTree>
       <p:nvGrpSpPr>
@@ -4262,14 +4109,7 @@
         <p:cNvGrpSpPr/>
         <p:nvPr/>
       </p:nvGrpSpPr>
-      <p:grpSpPr>
-        <a:xfrm>
-          <a:off x="0" y="0"/>
-          <a:ext cx="0" cy="0"/>
-          <a:chOff x="0" y="0"/>
-          <a:chExt cx="0" cy="0"/>
-        </a:xfrm>
-      </p:grpSpPr>
+      <p:grpSpPr/>
       <p:sp>
         <p:nvSpPr>
           <p:cNvPr id="2" name="Title 1"/>
@@ -4301,50 +4141,43 @@
             <p:ph idx="1"/>
           </p:nvPr>
         </p:nvSpPr>
-        <p:spPr>
-          <a:xfrm>
-            <a:off x="339213" y="1088923"/>
-            <a:ext cx="8229600" cy="4525963"/>
-          </a:xfrm>
-        </p:spPr>
-        <p:txBody>
-          <a:bodyPr>
-            <a:normAutofit fontScale="77500" lnSpcReduction="20000"/>
-          </a:bodyPr>
-          <a:lstStyle/>
-          <a:p>
-            <a:r>
-              <a:rPr lang="en-US" b="1" dirty="0"/>
+        <p:spPr/>
+        <p:txBody>
+          <a:bodyPr/>
+          <a:lstStyle/>
+          <a:p>
+            <a:r>
+              <a:rPr lang="en-US" b="1"/>
               <a:t>What is Changing</a:t>
             </a:r>
           </a:p>
           <a:p>
             <a:r>
-              <a:rPr lang="en-US" dirty="0"/>
+              <a:rPr lang="en-US"/>
               <a:t>AI is evolving from reactive systems (answering questions) to proactive agents (completing goals). Traditional AI waits for a prompt; Agentic AI breaks down a goal, creates a plan, calls tools, and executes — all autonomously.</a:t>
             </a:r>
           </a:p>
           <a:p>
             <a:r>
-              <a:rPr lang="en-US" b="1" dirty="0"/>
+              <a:rPr lang="en-US" b="1"/>
               <a:t>Business Impact</a:t>
             </a:r>
           </a:p>
           <a:p>
             <a:r>
-              <a:rPr lang="en-US" dirty="0"/>
+              <a:rPr lang="en-US"/>
               <a:t>40-60% reduction in repetitive task cycle time | 24/7 operations without staffing costs | 3x faster root-cause analysis in IT/ops</a:t>
             </a:r>
           </a:p>
           <a:p>
             <a:r>
-              <a:rPr lang="en-US" b="1" dirty="0"/>
+              <a:rPr lang="en-US" b="1"/>
               <a:t>Market Signal</a:t>
             </a:r>
           </a:p>
           <a:p>
             <a:r>
-              <a:rPr lang="en-US" i="1" dirty="0"/>
+              <a:rPr lang="en-US" i="1"/>
               <a:t>“By 2028, 15% of day-to-day work decisions will be made autonomously through agentic AI.” — Gartner, 2024</a:t>
             </a:r>
           </a:p>
@@ -4359,7 +4192,7 @@
 </file>
 
 <file path=ppt/slides/slide3.xml><?xml version="1.0" encoding="utf-8"?>
-<p:sld xmlns:a="http://schemas.openxmlformats.org/drawingml/2006/main" xmlns:r="http://schemas.openxmlformats.org/officeDocument/2006/relationships" xmlns:p="http://schemas.openxmlformats.org/presentationml/2006/main">
+<p:sld xmlns:a="http://schemas.openxmlformats.org/drawingml/2006/main" xmlns:p="http://schemas.openxmlformats.org/presentationml/2006/main" xmlns:r="http://schemas.openxmlformats.org/officeDocument/2006/relationships">
   <p:cSld>
     <p:spTree>
       <p:nvGrpSpPr>
@@ -4367,14 +4200,7 @@
         <p:cNvGrpSpPr/>
         <p:nvPr/>
       </p:nvGrpSpPr>
-      <p:grpSpPr>
-        <a:xfrm>
-          <a:off x="0" y="0"/>
-          <a:ext cx="0" cy="0"/>
-          <a:chOff x="0" y="0"/>
-          <a:chExt cx="0" cy="0"/>
-        </a:xfrm>
-      </p:grpSpPr>
+      <p:grpSpPr/>
       <p:sp>
         <p:nvSpPr>
           <p:cNvPr id="2" name="Title 1"/>
@@ -4406,62 +4232,55 @@
             <p:ph idx="1"/>
           </p:nvPr>
         </p:nvSpPr>
-        <p:spPr>
-          <a:xfrm>
-            <a:off x="457200" y="1295964"/>
-            <a:ext cx="8229600" cy="4525963"/>
-          </a:xfrm>
-        </p:spPr>
-        <p:txBody>
-          <a:bodyPr>
-            <a:normAutofit fontScale="62500" lnSpcReduction="20000"/>
-          </a:bodyPr>
-          <a:lstStyle/>
-          <a:p>
-            <a:r>
-              <a:rPr lang="en-US" b="1" dirty="0"/>
+        <p:spPr/>
+        <p:txBody>
+          <a:bodyPr/>
+          <a:lstStyle/>
+          <a:p>
+            <a:r>
+              <a:rPr lang="en-US" b="1"/>
               <a:t>Definition</a:t>
             </a:r>
           </a:p>
           <a:p>
             <a:r>
-              <a:rPr lang="en-US" dirty="0"/>
+              <a:rPr lang="en-US"/>
               <a:t>Agentic AI refers to AI systems that autonomously pursue goals by breaking them into sub-tasks, using external tools (APIs, databases, browsers), reasoning over intermediate results, and adapting plans when they encounter obstacles.</a:t>
             </a:r>
           </a:p>
           <a:p>
             <a:r>
-              <a:rPr lang="en-US" b="1" dirty="0"/>
+              <a:rPr lang="en-US" b="1"/>
               <a:t>Key Characteristics</a:t>
             </a:r>
           </a:p>
           <a:p>
             <a:r>
-              <a:rPr lang="en-US" dirty="0"/>
+              <a:rPr lang="en-US"/>
               <a:t>Goal-directed: Given “Book cheapest flight to NYC”, it searches, compares, and books — not just searches.</a:t>
             </a:r>
           </a:p>
           <a:p>
             <a:r>
-              <a:rPr lang="en-US" dirty="0"/>
+              <a:rPr lang="en-US"/>
               <a:t>Tool-using: Can call APIs, run code, query databases, and send emails.</a:t>
             </a:r>
           </a:p>
           <a:p>
             <a:r>
-              <a:rPr lang="en-US" dirty="0"/>
+              <a:rPr lang="en-US"/>
               <a:t>Self-correcting: If a step fails, it retries, reroutes, or escalates.</a:t>
             </a:r>
           </a:p>
           <a:p>
             <a:r>
-              <a:rPr lang="en-US" b="1" dirty="0"/>
+              <a:rPr lang="en-US" b="1"/>
               <a:t>Simple Example</a:t>
             </a:r>
           </a:p>
           <a:p>
             <a:r>
-              <a:rPr lang="en-US" i="1" dirty="0"/>
+              <a:rPr lang="en-US" i="1"/>
               <a:t>User: “Research the top 3 competitors and send me a summary by 5 PM.” An agentic AI browses the web, extracts data, compiles the report, and emails it — without further instructions.</a:t>
             </a:r>
           </a:p>
@@ -4476,7 +4295,7 @@
 </file>
 
 <file path=ppt/slides/slide4.xml><?xml version="1.0" encoding="utf-8"?>
-<p:sld xmlns:a="http://schemas.openxmlformats.org/drawingml/2006/main" xmlns:r="http://schemas.openxmlformats.org/officeDocument/2006/relationships" xmlns:p="http://schemas.openxmlformats.org/presentationml/2006/main">
+<p:sld xmlns:a="http://schemas.openxmlformats.org/drawingml/2006/main" xmlns:p="http://schemas.openxmlformats.org/presentationml/2006/main" xmlns:r="http://schemas.openxmlformats.org/officeDocument/2006/relationships">
   <p:cSld>
     <p:spTree>
       <p:nvGrpSpPr>
@@ -4484,14 +4303,7 @@
         <p:cNvGrpSpPr/>
         <p:nvPr/>
       </p:nvGrpSpPr>
-      <p:grpSpPr>
-        <a:xfrm>
-          <a:off x="0" y="0"/>
-          <a:ext cx="0" cy="0"/>
-          <a:chOff x="0" y="0"/>
-          <a:chExt cx="0" cy="0"/>
-        </a:xfrm>
-      </p:grpSpPr>
+      <p:grpSpPr/>
       <p:sp>
         <p:nvSpPr>
           <p:cNvPr id="2" name="Title 1"/>
@@ -4523,62 +4335,55 @@
             <p:ph idx="1"/>
           </p:nvPr>
         </p:nvSpPr>
-        <p:spPr>
-          <a:xfrm>
-            <a:off x="791497" y="1434844"/>
-            <a:ext cx="8229600" cy="4525963"/>
-          </a:xfrm>
-        </p:spPr>
-        <p:txBody>
-          <a:bodyPr>
-            <a:normAutofit fontScale="70000" lnSpcReduction="20000"/>
-          </a:bodyPr>
-          <a:lstStyle/>
-          <a:p>
-            <a:r>
-              <a:rPr lang="en-US" b="1" dirty="0"/>
+        <p:spPr/>
+        <p:txBody>
+          <a:bodyPr/>
+          <a:lstStyle/>
+          <a:p>
+            <a:r>
+              <a:rPr lang="en-US" b="1"/>
               <a:t>Traditional AI: Reactive</a:t>
             </a:r>
           </a:p>
           <a:p>
             <a:r>
-              <a:rPr lang="en-US" dirty="0"/>
+              <a:rPr lang="en-US"/>
               <a:t>Waits for input, returns a single response, then stops. Example: ChatGPT answering “What is the capital of France?” — one question, one answer, no follow-through.</a:t>
             </a:r>
           </a:p>
           <a:p>
             <a:r>
-              <a:rPr lang="en-US" b="1" dirty="0"/>
+              <a:rPr lang="en-US" b="1"/>
               <a:t>Agentic AI: Proactive</a:t>
             </a:r>
           </a:p>
           <a:p>
             <a:r>
-              <a:rPr lang="en-US" dirty="0"/>
+              <a:rPr lang="en-US"/>
               <a:t>Pursues a goal across many steps. Example: “Onboard a new client” — it creates the account, assigns a CSM, schedules kickoff, sends welcome email, and logs everything in CRM.</a:t>
             </a:r>
           </a:p>
           <a:p>
             <a:r>
-              <a:rPr lang="en-US" b="1" dirty="0"/>
+              <a:rPr lang="en-US" b="1"/>
               <a:t>Key Differences at a Glance</a:t>
             </a:r>
           </a:p>
           <a:p>
             <a:r>
-              <a:rPr lang="en-US" dirty="0"/>
+              <a:rPr lang="en-US"/>
               <a:t>Single-step (Traditional) vs Multi-step with tool use (Agentic)</a:t>
             </a:r>
           </a:p>
           <a:p>
             <a:r>
-              <a:rPr lang="en-US" dirty="0"/>
+              <a:rPr lang="en-US"/>
               <a:t>Low autonomy, human drives each step (Traditional) vs High autonomy, human sets goal only (Agentic)</a:t>
             </a:r>
           </a:p>
           <a:p>
             <a:r>
-              <a:rPr lang="en-US" dirty="0"/>
+              <a:rPr lang="en-US"/>
               <a:t>No memory between sessions (Traditional) vs Persistent memory enables learning over time (Agentic)</a:t>
             </a:r>
           </a:p>
@@ -4593,7 +4398,7 @@
 </file>
 
 <file path=ppt/slides/slide5.xml><?xml version="1.0" encoding="utf-8"?>
-<p:sld xmlns:a="http://schemas.openxmlformats.org/drawingml/2006/main" xmlns:r="http://schemas.openxmlformats.org/officeDocument/2006/relationships" xmlns:p="http://schemas.openxmlformats.org/presentationml/2006/main">
+<p:sld xmlns:a="http://schemas.openxmlformats.org/drawingml/2006/main" xmlns:p="http://schemas.openxmlformats.org/presentationml/2006/main" xmlns:r="http://schemas.openxmlformats.org/officeDocument/2006/relationships">
   <p:cSld>
     <p:spTree>
       <p:nvGrpSpPr>
@@ -4601,14 +4406,7 @@
         <p:cNvGrpSpPr/>
         <p:nvPr/>
       </p:nvGrpSpPr>
-      <p:grpSpPr>
-        <a:xfrm>
-          <a:off x="0" y="0"/>
-          <a:ext cx="0" cy="0"/>
-          <a:chOff x="0" y="0"/>
-          <a:chExt cx="0" cy="0"/>
-        </a:xfrm>
-      </p:grpSpPr>
+      <p:grpSpPr/>
       <p:sp>
         <p:nvSpPr>
           <p:cNvPr id="2" name="Title 1"/>
@@ -4640,68 +4438,61 @@
             <p:ph idx="1"/>
           </p:nvPr>
         </p:nvSpPr>
-        <p:spPr>
-          <a:xfrm>
-            <a:off x="358877" y="1166018"/>
-            <a:ext cx="8229600" cy="4525963"/>
-          </a:xfrm>
-        </p:spPr>
-        <p:txBody>
-          <a:bodyPr>
-            <a:normAutofit fontScale="62500" lnSpcReduction="20000"/>
-          </a:bodyPr>
-          <a:lstStyle/>
-          <a:p>
-            <a:r>
-              <a:rPr lang="en-US" dirty="0"/>
+        <p:spPr/>
+        <p:txBody>
+          <a:bodyPr/>
+          <a:lstStyle/>
+          <a:p>
+            <a:r>
+              <a:rPr lang="en-US"/>
               <a:t>Think of an Agentic AI as a skilled new employee who has been given a job description, a desk, and a toolbox. They don’t need hand-holding for every task.</a:t>
             </a:r>
           </a:p>
           <a:p>
             <a:r>
-              <a:rPr lang="en-US" b="1" dirty="0"/>
+              <a:rPr lang="en-US" b="1"/>
               <a:t>LLM = Brain</a:t>
             </a:r>
           </a:p>
           <a:p>
             <a:r>
-              <a:rPr lang="en-US" dirty="0"/>
+              <a:rPr lang="en-US"/>
               <a:t>Reasons, understands language, makes decisions. Like a smart analyst who reads reports and draws conclusions.</a:t>
             </a:r>
           </a:p>
           <a:p>
             <a:r>
-              <a:rPr lang="en-US" b="1" dirty="0"/>
+              <a:rPr lang="en-US" b="1"/>
               <a:t>Tools = Hands</a:t>
             </a:r>
           </a:p>
           <a:p>
             <a:r>
-              <a:rPr lang="en-US" dirty="0"/>
+              <a:rPr lang="en-US"/>
               <a:t>Web browsers, APIs, code interpreters, email clients. The agent can search Google, pull a report from Salesforce, or trigger a Jira ticket.</a:t>
             </a:r>
           </a:p>
           <a:p>
             <a:r>
-              <a:rPr lang="en-US" b="1" dirty="0"/>
+              <a:rPr lang="en-US" b="1"/>
               <a:t>Memory = Experience</a:t>
             </a:r>
           </a:p>
           <a:p>
             <a:r>
-              <a:rPr lang="en-US" dirty="0"/>
+              <a:rPr lang="en-US"/>
               <a:t>Remembers past interactions, client preferences, and prior decisions — like an employee who recalls what worked last quarter.</a:t>
             </a:r>
           </a:p>
           <a:p>
             <a:r>
-              <a:rPr lang="en-US" b="1" dirty="0"/>
+              <a:rPr lang="en-US" b="1"/>
               <a:t>Planner = Manager</a:t>
             </a:r>
           </a:p>
           <a:p>
             <a:r>
-              <a:rPr lang="en-US" dirty="0"/>
+              <a:rPr lang="en-US"/>
               <a:t>Breaks big goals into steps, sequences tasks, delegates to sub-agents — like a project manager orchestrating a team.</a:t>
             </a:r>
           </a:p>
@@ -4716,7 +4507,7 @@
 </file>
 
 <file path=ppt/slides/slide6.xml><?xml version="1.0" encoding="utf-8"?>
-<p:sld xmlns:a="http://schemas.openxmlformats.org/drawingml/2006/main" xmlns:r="http://schemas.openxmlformats.org/officeDocument/2006/relationships" xmlns:p="http://schemas.openxmlformats.org/presentationml/2006/main">
+<p:sld xmlns:a="http://schemas.openxmlformats.org/drawingml/2006/main" xmlns:p="http://schemas.openxmlformats.org/presentationml/2006/main" xmlns:r="http://schemas.openxmlformats.org/officeDocument/2006/relationships">
   <p:cSld>
     <p:spTree>
       <p:nvGrpSpPr>
@@ -4724,14 +4515,7 @@
         <p:cNvGrpSpPr/>
         <p:nvPr/>
       </p:nvGrpSpPr>
-      <p:grpSpPr>
-        <a:xfrm>
-          <a:off x="0" y="0"/>
-          <a:ext cx="0" cy="0"/>
-          <a:chOff x="0" y="0"/>
-          <a:chExt cx="0" cy="0"/>
-        </a:xfrm>
-      </p:grpSpPr>
+      <p:grpSpPr/>
       <p:sp>
         <p:nvSpPr>
           <p:cNvPr id="2" name="Title 1"/>
@@ -4748,7 +4532,6 @@
           <a:lstStyle/>
           <a:p>
             <a:r>
-              <a:rPr dirty="0"/>
               <a:t>Core Components</a:t>
             </a:r>
           </a:p>
@@ -4764,74 +4547,67 @@
             <p:ph idx="1"/>
           </p:nvPr>
         </p:nvSpPr>
-        <p:spPr>
-          <a:xfrm>
-            <a:off x="457200" y="1417638"/>
-            <a:ext cx="8229600" cy="4525963"/>
-          </a:xfrm>
-        </p:spPr>
-        <p:txBody>
-          <a:bodyPr>
-            <a:normAutofit fontScale="62500" lnSpcReduction="20000"/>
-          </a:bodyPr>
-          <a:lstStyle/>
-          <a:p>
-            <a:r>
-              <a:rPr lang="en-US" b="1" dirty="0"/>
+        <p:spPr/>
+        <p:txBody>
+          <a:bodyPr/>
+          <a:lstStyle/>
+          <a:p>
+            <a:r>
+              <a:rPr lang="en-US" b="1"/>
               <a:t>Reasoning Engine (LLM)</a:t>
             </a:r>
           </a:p>
           <a:p>
             <a:r>
-              <a:rPr lang="en-US" dirty="0"/>
+              <a:rPr lang="en-US"/>
               <a:t>The core intelligence that interprets goals, evaluates options, and generates next actions. Examples: GPT-4, Claude, Gemini.</a:t>
             </a:r>
           </a:p>
           <a:p>
             <a:r>
-              <a:rPr lang="en-US" b="1" dirty="0"/>
+              <a:rPr lang="en-US" b="1"/>
               <a:t>Planner / Orchestrator</a:t>
             </a:r>
           </a:p>
           <a:p>
             <a:r>
-              <a:rPr lang="en-US" dirty="0"/>
+              <a:rPr lang="en-US"/>
               <a:t>Decomposes a goal into sub-tasks and sequences them. “To close this support ticket, first retrieve account data, then diagnose, then respond.”</a:t>
             </a:r>
           </a:p>
           <a:p>
             <a:r>
-              <a:rPr lang="en-US" b="1" dirty="0"/>
+              <a:rPr lang="en-US" b="1"/>
               <a:t>Tools / APIs</a:t>
             </a:r>
           </a:p>
           <a:p>
             <a:r>
-              <a:rPr lang="en-US" dirty="0"/>
+              <a:rPr lang="en-US"/>
               <a:t>External capabilities: web search, database queries, code execution, CRM updates, email. Each tool extends what the agent can do in the real world.</a:t>
             </a:r>
           </a:p>
           <a:p>
             <a:r>
-              <a:rPr lang="en-US" b="1" dirty="0"/>
+              <a:rPr lang="en-US" b="1"/>
               <a:t>Memory (Short + Long Term)</a:t>
             </a:r>
           </a:p>
           <a:p>
             <a:r>
-              <a:rPr lang="en-US" dirty="0"/>
+              <a:rPr lang="en-US"/>
               <a:t>Short-term: current session context. Long-term: vector database storing past interactions, policies, and domain knowledge for retrieval.</a:t>
             </a:r>
           </a:p>
           <a:p>
             <a:r>
-              <a:rPr lang="en-US" b="1" dirty="0"/>
+              <a:rPr lang="en-US" b="1"/>
               <a:t>Feedback Loop</a:t>
             </a:r>
           </a:p>
           <a:p>
             <a:r>
-              <a:rPr lang="en-US" dirty="0"/>
+              <a:rPr lang="en-US"/>
               <a:t>After each action, the agent observes the result and updates its plan. If an API call fails, it retries with different parameters or escalates to a human.</a:t>
             </a:r>
           </a:p>
@@ -4846,7 +4622,7 @@
 </file>
 
 <file path=ppt/slides/slide7.xml><?xml version="1.0" encoding="utf-8"?>
-<p:sld xmlns:a="http://schemas.openxmlformats.org/drawingml/2006/main" xmlns:r="http://schemas.openxmlformats.org/officeDocument/2006/relationships" xmlns:p="http://schemas.openxmlformats.org/presentationml/2006/main">
+<p:sld xmlns:a="http://schemas.openxmlformats.org/drawingml/2006/main" xmlns:p="http://schemas.openxmlformats.org/presentationml/2006/main" xmlns:r="http://schemas.openxmlformats.org/officeDocument/2006/relationships">
   <p:cSld>
     <p:spTree>
       <p:nvGrpSpPr>
@@ -4854,14 +4630,7 @@
         <p:cNvGrpSpPr/>
         <p:nvPr/>
       </p:nvGrpSpPr>
-      <p:grpSpPr>
-        <a:xfrm>
-          <a:off x="0" y="0"/>
-          <a:ext cx="0" cy="0"/>
-          <a:chOff x="0" y="0"/>
-          <a:chExt cx="0" cy="0"/>
-        </a:xfrm>
-      </p:grpSpPr>
+      <p:grpSpPr/>
       <p:sp>
         <p:nvSpPr>
           <p:cNvPr id="2" name="Title 1"/>
@@ -4893,55 +4662,48 @@
             <p:ph idx="1"/>
           </p:nvPr>
         </p:nvSpPr>
-        <p:spPr>
-          <a:xfrm>
-            <a:off x="457200" y="1265903"/>
-            <a:ext cx="8229600" cy="4525963"/>
-          </a:xfrm>
-        </p:spPr>
-        <p:txBody>
-          <a:bodyPr>
-            <a:normAutofit lnSpcReduction="10000"/>
-          </a:bodyPr>
-          <a:lstStyle/>
-          <a:p>
-            <a:r>
-              <a:rPr lang="en-US" b="1" dirty="0"/>
+        <p:spPr/>
+        <p:txBody>
+          <a:bodyPr/>
+          <a:lstStyle/>
+          <a:p>
+            <a:r>
+              <a:rPr lang="en-US" b="1"/>
               <a:t>1. Goal</a:t>
             </a:r>
             <a:r>
-              <a:rPr lang="en-US" dirty="0"/>
-              <a:t> — One instruction starts everything. E.g., “Resolve all P1 incidents.”</a:t>
-            </a:r>
-          </a:p>
-          <a:p>
-            <a:r>
-              <a:rPr lang="en-US" b="1" dirty="0"/>
+              <a:rPr lang="en-US"/>
+              <a:t xml:space="preserve"> — One instruction starts everything. E.g., “Resolve all P1 incidents.”</a:t>
+            </a:r>
+          </a:p>
+          <a:p>
+            <a:r>
+              <a:rPr lang="en-US" b="1"/>
               <a:t>2. Plan</a:t>
             </a:r>
             <a:r>
-              <a:rPr lang="en-US" dirty="0"/>
-              <a:t> — Goal is broken into ordered steps before any action is taken.</a:t>
-            </a:r>
-          </a:p>
-          <a:p>
-            <a:r>
-              <a:rPr lang="en-US" b="1" dirty="0"/>
+              <a:rPr lang="en-US"/>
+              <a:t xml:space="preserve"> — Goal is broken into ordered steps before any action is taken.</a:t>
+            </a:r>
+          </a:p>
+          <a:p>
+            <a:r>
+              <a:rPr lang="en-US" b="1"/>
               <a:t>3. Execute</a:t>
             </a:r>
             <a:r>
-              <a:rPr lang="en-US" dirty="0"/>
-              <a:t> — Each step runs using the right tool: API, shell command, or database query.</a:t>
-            </a:r>
-          </a:p>
-          <a:p>
-            <a:r>
-              <a:rPr lang="en-US" b="1" dirty="0"/>
+              <a:rPr lang="en-US"/>
+              <a:t xml:space="preserve"> — Each step runs using the right tool: API, shell command, or database query.</a:t>
+            </a:r>
+          </a:p>
+          <a:p>
+            <a:r>
+              <a:rPr lang="en-US" b="1"/>
               <a:t>4. Observe → Adjust → Repeat</a:t>
             </a:r>
             <a:r>
-              <a:rPr lang="en-US" dirty="0"/>
-              <a:t> — After each step, results are checked. Failures trigger a retry or human escalation.</a:t>
+              <a:rPr lang="en-US"/>
+              <a:t xml:space="preserve"> — After each step, results are checked. Failures trigger a retry or human escalation.</a:t>
             </a:r>
           </a:p>
         </p:txBody>
@@ -4955,7 +4717,7 @@
 </file>
 
 <file path=ppt/slides/slide8.xml><?xml version="1.0" encoding="utf-8"?>
-<p:sld xmlns:a="http://schemas.openxmlformats.org/drawingml/2006/main" xmlns:r="http://schemas.openxmlformats.org/officeDocument/2006/relationships" xmlns:p="http://schemas.openxmlformats.org/presentationml/2006/main">
+<p:sld xmlns:a="http://schemas.openxmlformats.org/drawingml/2006/main" xmlns:p="http://schemas.openxmlformats.org/presentationml/2006/main" xmlns:r="http://schemas.openxmlformats.org/officeDocument/2006/relationships">
   <p:cSld>
     <p:spTree>
       <p:nvGrpSpPr>
@@ -4963,14 +4725,7 @@
         <p:cNvGrpSpPr/>
         <p:nvPr/>
       </p:nvGrpSpPr>
-      <p:grpSpPr>
-        <a:xfrm>
-          <a:off x="0" y="0"/>
-          <a:ext cx="0" cy="0"/>
-          <a:chOff x="0" y="0"/>
-          <a:chExt cx="0" cy="0"/>
-        </a:xfrm>
-      </p:grpSpPr>
+      <p:grpSpPr/>
       <p:sp>
         <p:nvSpPr>
           <p:cNvPr id="2" name="Title 1"/>
@@ -4987,7 +4742,6 @@
           <a:lstStyle/>
           <a:p>
             <a:r>
-              <a:rPr dirty="0"/>
               <a:t>Types of Agents</a:t>
             </a:r>
           </a:p>
@@ -5003,62 +4757,55 @@
             <p:ph idx="1"/>
           </p:nvPr>
         </p:nvSpPr>
-        <p:spPr>
-          <a:xfrm>
-            <a:off x="339213" y="1293837"/>
-            <a:ext cx="8229600" cy="4525963"/>
-          </a:xfrm>
-        </p:spPr>
-        <p:txBody>
-          <a:bodyPr>
-            <a:normAutofit fontScale="62500" lnSpcReduction="20000"/>
-          </a:bodyPr>
-          <a:lstStyle/>
-          <a:p>
-            <a:r>
-              <a:rPr lang="en-US" b="1" dirty="0"/>
+        <p:spPr/>
+        <p:txBody>
+          <a:bodyPr/>
+          <a:lstStyle/>
+          <a:p>
+            <a:r>
+              <a:rPr lang="en-US" b="1"/>
               <a:t>Reactive Agents</a:t>
             </a:r>
           </a:p>
           <a:p>
             <a:r>
-              <a:rPr lang="en-US" dirty="0"/>
+              <a:rPr lang="en-US"/>
               <a:t>Respond to immediate inputs without memory or planning. Example: a chatbot that answers FAQs. Fast, predictable, but limited in scope.</a:t>
             </a:r>
           </a:p>
           <a:p>
             <a:r>
-              <a:rPr lang="en-US" b="1" dirty="0"/>
+              <a:rPr lang="en-US" b="1"/>
               <a:t>Planning Agents</a:t>
             </a:r>
           </a:p>
           <a:p>
             <a:r>
-              <a:rPr lang="en-US" dirty="0"/>
+              <a:rPr lang="en-US"/>
               <a:t>Use reasoning to form multi-step plans before acting. Example: an agent that plans a data migration by sequencing backup → test → migrate → validate.</a:t>
             </a:r>
           </a:p>
           <a:p>
             <a:r>
-              <a:rPr lang="en-US" b="1" dirty="0"/>
+              <a:rPr lang="en-US" b="1"/>
               <a:t>Multi-Agent Systems</a:t>
             </a:r>
           </a:p>
           <a:p>
             <a:r>
-              <a:rPr lang="en-US" dirty="0"/>
+              <a:rPr lang="en-US"/>
               <a:t>Multiple specialized agents collaborate. Example: an Orchestrator delegates to a Research Agent, a Code Agent, and a QA Agent — like a software development team.</a:t>
             </a:r>
           </a:p>
           <a:p>
             <a:r>
-              <a:rPr lang="en-US" b="1" dirty="0"/>
+              <a:rPr lang="en-US" b="1"/>
               <a:t>Fully Autonomous Agents</a:t>
             </a:r>
           </a:p>
           <a:p>
             <a:r>
-              <a:rPr lang="en-US" dirty="0"/>
+              <a:rPr lang="en-US"/>
               <a:t>Operate with minimal human oversight over extended time. Example: an AI that monitors infrastructure 24/7, self-heals issues, and only escalates anomalies above a threshold.</a:t>
             </a:r>
           </a:p>
@@ -5073,7 +4820,7 @@
 </file>
 
 <file path=ppt/slides/slide9.xml><?xml version="1.0" encoding="utf-8"?>
-<p:sld xmlns:a="http://schemas.openxmlformats.org/drawingml/2006/main" xmlns:r="http://schemas.openxmlformats.org/officeDocument/2006/relationships" xmlns:p="http://schemas.openxmlformats.org/presentationml/2006/main">
+<p:sld xmlns:a="http://schemas.openxmlformats.org/drawingml/2006/main" xmlns:p="http://schemas.openxmlformats.org/presentationml/2006/main" xmlns:r="http://schemas.openxmlformats.org/officeDocument/2006/relationships">
   <p:cSld>
     <p:spTree>
       <p:nvGrpSpPr>
@@ -5081,14 +4828,7 @@
         <p:cNvGrpSpPr/>
         <p:nvPr/>
       </p:nvGrpSpPr>
-      <p:grpSpPr>
-        <a:xfrm>
-          <a:off x="0" y="0"/>
-          <a:ext cx="0" cy="0"/>
-          <a:chOff x="0" y="0"/>
-          <a:chExt cx="0" cy="0"/>
-        </a:xfrm>
-      </p:grpSpPr>
+      <p:grpSpPr/>
       <p:sp>
         <p:nvSpPr>
           <p:cNvPr id="2" name="Title 1"/>
@@ -5120,62 +4860,55 @@
             <p:ph idx="1"/>
           </p:nvPr>
         </p:nvSpPr>
-        <p:spPr>
-          <a:xfrm>
-            <a:off x="457200" y="1166018"/>
-            <a:ext cx="8229600" cy="4525963"/>
-          </a:xfrm>
-        </p:spPr>
-        <p:txBody>
-          <a:bodyPr>
-            <a:normAutofit fontScale="62500" lnSpcReduction="20000"/>
-          </a:bodyPr>
-          <a:lstStyle/>
-          <a:p>
-            <a:r>
-              <a:rPr lang="en-US" b="1" dirty="0"/>
+        <p:spPr/>
+        <p:txBody>
+          <a:bodyPr/>
+          <a:lstStyle/>
+          <a:p>
+            <a:r>
+              <a:rPr lang="en-US" b="1"/>
               <a:t>BFSI: Fraud Detection &amp; AML</a:t>
             </a:r>
           </a:p>
           <a:p>
             <a:r>
-              <a:rPr lang="en-US" dirty="0"/>
+              <a:rPr lang="en-US"/>
               <a:t>An agent monitors transactions in real-time, cross-references sanctions lists, flags anomalies, and auto-files Suspicious Activity Reports — cutting analyst workload by 70%.</a:t>
             </a:r>
           </a:p>
           <a:p>
             <a:r>
-              <a:rPr lang="en-US" b="1" dirty="0"/>
+              <a:rPr lang="en-US" b="1"/>
               <a:t>E-Commerce: Dynamic Pricing</a:t>
             </a:r>
           </a:p>
           <a:p>
             <a:r>
-              <a:rPr lang="en-US" dirty="0"/>
+              <a:rPr lang="en-US"/>
               <a:t>Tracks competitor pricing, inventory levels, and demand signals every 15 minutes, then autonomously adjusts prices to maximize margin — no human approval needed per change.</a:t>
             </a:r>
           </a:p>
           <a:p>
             <a:r>
-              <a:rPr lang="en-US" b="1" dirty="0"/>
+              <a:rPr lang="en-US" b="1"/>
               <a:t>IT Operations: Incident Resolution</a:t>
             </a:r>
           </a:p>
           <a:p>
             <a:r>
-              <a:rPr lang="en-US" dirty="0"/>
+              <a:rPr lang="en-US"/>
               <a:t>Detects alerts, correlates logs, executes runbooks, and resolves 60% of L1 incidents autonomously. Mean time to resolve drops from 45 minutes to under 4 minutes.</a:t>
             </a:r>
           </a:p>
           <a:p>
             <a:r>
-              <a:rPr lang="en-US" b="1" dirty="0"/>
+              <a:rPr lang="en-US" b="1"/>
               <a:t>Analytics: BI &amp; Insight Agents</a:t>
             </a:r>
           </a:p>
           <a:p>
             <a:r>
-              <a:rPr lang="en-US" dirty="0"/>
+              <a:rPr lang="en-US"/>
               <a:t>A business user says “Why did revenue drop in Q3?”. The agent queries the data warehouse, builds visualizations, identifies root causes, and delivers a narrative report in minutes.</a:t>
             </a:r>
           </a:p>
